--- a/assets/lessons/lectures/astronomy/planning-observations-2018.pptx
+++ b/assets/lessons/lectures/astronomy/planning-observations-2018.pptx
@@ -36848,7 +36848,7 @@
                 <a:sym typeface="Calibri"/>
                 <a:hlinkClick r:id="rId3"/>
               </a:rPr>
-              <a:t>http://www.iiap.res.in/personnel/reks/software/javascript/calclst.php</a:t>
+              <a:t>https://aa.usno.navy.mil/data/siderealtime</a:t>
             </a:r>
             <a:endParaRPr b="0" i="0" sz="1800" u="none" cap="none" strike="noStrike">
               <a:solidFill>
@@ -36888,7 +36888,7 @@
                 <a:cs typeface="Calibri"/>
                 <a:sym typeface="Calibri"/>
               </a:rPr>
-              <a:t>http://www.wwu.edu/skywise/skymobile/skywatch.html</a:t>
+              <a:t>Enter the date, UT1 time, and longitude.</a:t>
             </a:r>
             <a:endParaRPr b="0" i="0" sz="1800" u="none" cap="none" strike="noStrike">
               <a:solidFill>

--- a/assets/lessons/lectures/astronomy/planning-observations-2018.pptx
+++ b/assets/lessons/lectures/astronomy/planning-observations-2018.pptx
@@ -31020,30 +31020,6 @@
       </p:sp>
       <p:sp>
         <p:nvSpPr>
-          <p:cNvPr id="238" name="DSPIRA 1"/>
-          <p:cNvSpPr>
-            <a:spLocks noGrp="1"/>
-          </p:cNvSpPr>
-          <p:nvPr/>
-        </p:nvSpPr>
-        <p:spPr>
-          <a:xfrm>
-            <a:off x="0" y="0"/>
-            <a:ext cx="9144000" cy="342900"/>
-          </a:xfrm>
-          <a:prstGeom prst="rect">
-            <a:avLst/>
-          </a:prstGeom>
-          <a:solidFill>
-            <a:srgbClr val="FFFFFF"/>
-          </a:solidFill>
-          <a:ln w="0">
-            <a:noFill/>
-          </a:ln>
-        </p:spPr>
-      </p:sp>
-      <p:sp>
-        <p:nvSpPr>
           <p:cNvPr id="239" name="DSPIRA 2"/>
           <p:cNvSpPr>
             <a:spLocks noGrp="1"/>
@@ -31065,57 +31041,6 @@
             <a:noFill/>
           </a:ln>
         </p:spPr>
-      </p:sp>
-      <p:sp>
-        <p:nvSpPr>
-          <p:cNvPr id="240" name="DSPIRA 3"/>
-          <p:cNvSpPr>
-            <a:spLocks noGrp="1"/>
-          </p:cNvSpPr>
-          <p:nvPr/>
-        </p:nvSpPr>
-        <p:spPr>
-          <a:xfrm>
-            <a:off x="228600" y="76200"/>
-            <a:ext cx="4762500" cy="228600"/>
-          </a:xfrm>
-          <a:prstGeom prst="rect">
-            <a:avLst/>
-          </a:prstGeom>
-          <a:noFill/>
-          <a:ln w="0">
-            <a:noFill/>
-          </a:ln>
-        </p:spPr>
-        <p:txBody>
-          <a:bodyPr>
-            <a:noAutofit/>
-          </a:bodyPr>
-          <a:lstStyle/>
-          <a:p>
-            <a:pPr>
-              <a:defRPr sz="1200" b="1">
-                <a:solidFill>
-                  <a:srgbClr val="002855"/>
-                </a:solidFill>
-                <a:latin typeface="Arial"/>
-                <a:ea typeface="Arial"/>
-                <a:cs typeface="Arial"/>
-              </a:defRPr>
-            </a:pPr>
-            <a:r>
-              <a:rPr sz="1200" b="1">
-                <a:solidFill>
-                  <a:srgbClr val="002855"/>
-                </a:solidFill>
-                <a:latin typeface="Arial"/>
-                <a:ea typeface="Arial"/>
-                <a:cs typeface="Arial"/>
-              </a:rPr>
-              <a:t>WVU DSPIRA</a:t>
-            </a:r>
-          </a:p>
-        </p:txBody>
       </p:sp>
       <p:sp>
         <p:nvSpPr>
@@ -31215,6 +31140,156 @@
                 <a:cs typeface="Arial"/>
               </a:rPr>
               <a:t>1 of 20</a:t>
+            </a:r>
+          </a:p>
+        </p:txBody>
+      </p:sp>
+      <p:sp>
+        <p:nvSpPr>
+          <p:cNvPr id="243" name="WVU DSPIRA navy band"/>
+          <p:cNvSpPr>
+            <a:spLocks noGrp="1"/>
+          </p:cNvSpPr>
+          <p:nvPr/>
+        </p:nvSpPr>
+        <p:spPr>
+          <a:xfrm>
+            <a:off x="0" y="0"/>
+            <a:ext cx="9144000" cy="323850"/>
+          </a:xfrm>
+          <a:prstGeom prst="rect">
+            <a:avLst/>
+          </a:prstGeom>
+          <a:solidFill>
+            <a:srgbClr val="002855"/>
+          </a:solidFill>
+          <a:ln w="0">
+            <a:noFill/>
+          </a:ln>
+        </p:spPr>
+      </p:sp>
+      <p:sp>
+        <p:nvSpPr>
+          <p:cNvPr id="244" name="WVU DSPIRA gold rule"/>
+          <p:cNvSpPr>
+            <a:spLocks noGrp="1"/>
+          </p:cNvSpPr>
+          <p:nvPr/>
+        </p:nvSpPr>
+        <p:spPr>
+          <a:xfrm>
+            <a:off x="0" y="323850"/>
+            <a:ext cx="9144000" cy="19050"/>
+          </a:xfrm>
+          <a:prstGeom prst="rect">
+            <a:avLst/>
+          </a:prstGeom>
+          <a:solidFill>
+            <a:srgbClr val="EEAA00"/>
+          </a:solidFill>
+          <a:ln w="0">
+            <a:noFill/>
+          </a:ln>
+        </p:spPr>
+      </p:sp>
+      <p:sp>
+        <p:nvSpPr>
+          <p:cNvPr id="245" name="WVU DSPIRA name"/>
+          <p:cNvSpPr>
+            <a:spLocks noGrp="1"/>
+          </p:cNvSpPr>
+          <p:nvPr/>
+        </p:nvSpPr>
+        <p:spPr>
+          <a:xfrm>
+            <a:off x="228600" y="19050"/>
+            <a:ext cx="2857500" cy="257175"/>
+          </a:xfrm>
+          <a:prstGeom prst="rect">
+            <a:avLst/>
+          </a:prstGeom>
+          <a:noFill/>
+          <a:ln w="0">
+            <a:noFill/>
+          </a:ln>
+        </p:spPr>
+        <p:txBody>
+          <a:bodyPr>
+            <a:noAutofit/>
+          </a:bodyPr>
+          <a:lstStyle/>
+          <a:p>
+            <a:pPr>
+              <a:defRPr sz="1600" b="1">
+                <a:solidFill>
+                  <a:srgbClr val="FFFFFF"/>
+                </a:solidFill>
+                <a:latin typeface="Arial"/>
+                <a:ea typeface="Arial"/>
+                <a:cs typeface="Arial"/>
+              </a:defRPr>
+            </a:pPr>
+            <a:r>
+              <a:rPr sz="1600" b="1">
+                <a:solidFill>
+                  <a:srgbClr val="FFFFFF"/>
+                </a:solidFill>
+                <a:latin typeface="Arial"/>
+                <a:ea typeface="Arial"/>
+                <a:cs typeface="Arial"/>
+              </a:rPr>
+              <a:t>WVU DSPIRA</a:t>
+            </a:r>
+          </a:p>
+        </p:txBody>
+      </p:sp>
+      <p:sp>
+        <p:nvSpPr>
+          <p:cNvPr id="246" name="WVU DSPIRA university"/>
+          <p:cNvSpPr>
+            <a:spLocks noGrp="1"/>
+          </p:cNvSpPr>
+          <p:nvPr/>
+        </p:nvSpPr>
+        <p:spPr>
+          <a:xfrm>
+            <a:off x="6286500" y="114300"/>
+            <a:ext cx="2628900" cy="171450"/>
+          </a:xfrm>
+          <a:prstGeom prst="rect">
+            <a:avLst/>
+          </a:prstGeom>
+          <a:noFill/>
+          <a:ln w="0">
+            <a:noFill/>
+          </a:ln>
+        </p:spPr>
+        <p:txBody>
+          <a:bodyPr>
+            <a:noAutofit/>
+          </a:bodyPr>
+          <a:lstStyle/>
+          <a:p>
+            <a:pPr algn="r">
+              <a:defRPr sz="900">
+                <a:solidFill>
+                  <a:srgbClr val="FFFFFF"/>
+                </a:solidFill>
+                <a:latin typeface="Arial"/>
+                <a:ea typeface="Arial"/>
+                <a:cs typeface="Arial"/>
+              </a:defRPr>
+            </a:pPr>
+            <a:r>
+              <a:rPr sz="900">
+                <a:solidFill>
+                  <a:srgbClr val="FFFFFF"/>
+                </a:solidFill>
+                <a:latin typeface="Arial"/>
+                <a:ea typeface="Arial"/>
+                <a:cs typeface="Arial"/>
+              </a:rPr>
+              <a:t>WEST VIRGINIA UNIVERSITY</a:t>
             </a:r>
           </a:p>
         </p:txBody>
@@ -31691,30 +31766,6 @@
       </p:pic>
       <p:sp>
         <p:nvSpPr>
-          <p:cNvPr id="303" name="DSPIRA 1"/>
-          <p:cNvSpPr>
-            <a:spLocks noGrp="1"/>
-          </p:cNvSpPr>
-          <p:nvPr/>
-        </p:nvSpPr>
-        <p:spPr>
-          <a:xfrm>
-            <a:off x="0" y="0"/>
-            <a:ext cx="9144000" cy="342900"/>
-          </a:xfrm>
-          <a:prstGeom prst="rect">
-            <a:avLst/>
-          </a:prstGeom>
-          <a:solidFill>
-            <a:srgbClr val="FFFFFF"/>
-          </a:solidFill>
-          <a:ln w="0">
-            <a:noFill/>
-          </a:ln>
-        </p:spPr>
-      </p:sp>
-      <p:sp>
-        <p:nvSpPr>
           <p:cNvPr id="304" name="DSPIRA 2"/>
           <p:cNvSpPr>
             <a:spLocks noGrp="1"/>
@@ -31736,57 +31787,6 @@
             <a:noFill/>
           </a:ln>
         </p:spPr>
-      </p:sp>
-      <p:sp>
-        <p:nvSpPr>
-          <p:cNvPr id="305" name="DSPIRA 3"/>
-          <p:cNvSpPr>
-            <a:spLocks noGrp="1"/>
-          </p:cNvSpPr>
-          <p:nvPr/>
-        </p:nvSpPr>
-        <p:spPr>
-          <a:xfrm>
-            <a:off x="228600" y="76200"/>
-            <a:ext cx="4762500" cy="228600"/>
-          </a:xfrm>
-          <a:prstGeom prst="rect">
-            <a:avLst/>
-          </a:prstGeom>
-          <a:noFill/>
-          <a:ln w="0">
-            <a:noFill/>
-          </a:ln>
-        </p:spPr>
-        <p:txBody>
-          <a:bodyPr>
-            <a:noAutofit/>
-          </a:bodyPr>
-          <a:lstStyle/>
-          <a:p>
-            <a:pPr>
-              <a:defRPr sz="1200" b="1">
-                <a:solidFill>
-                  <a:srgbClr val="002855"/>
-                </a:solidFill>
-                <a:latin typeface="Arial"/>
-                <a:ea typeface="Arial"/>
-                <a:cs typeface="Arial"/>
-              </a:defRPr>
-            </a:pPr>
-            <a:r>
-              <a:rPr sz="1200" b="1">
-                <a:solidFill>
-                  <a:srgbClr val="002855"/>
-                </a:solidFill>
-                <a:latin typeface="Arial"/>
-                <a:ea typeface="Arial"/>
-                <a:cs typeface="Arial"/>
-              </a:rPr>
-              <a:t>WVU DSPIRA</a:t>
-            </a:r>
-          </a:p>
-        </p:txBody>
       </p:sp>
       <p:sp>
         <p:nvSpPr>
@@ -31886,6 +31886,156 @@
                 <a:cs typeface="Arial"/>
               </a:rPr>
               <a:t>9 of 20</a:t>
+            </a:r>
+          </a:p>
+        </p:txBody>
+      </p:sp>
+      <p:sp>
+        <p:nvSpPr>
+          <p:cNvPr id="308" name="WVU DSPIRA navy band"/>
+          <p:cNvSpPr>
+            <a:spLocks noGrp="1"/>
+          </p:cNvSpPr>
+          <p:nvPr/>
+        </p:nvSpPr>
+        <p:spPr>
+          <a:xfrm>
+            <a:off x="0" y="0"/>
+            <a:ext cx="9144000" cy="323850"/>
+          </a:xfrm>
+          <a:prstGeom prst="rect">
+            <a:avLst/>
+          </a:prstGeom>
+          <a:solidFill>
+            <a:srgbClr val="002855"/>
+          </a:solidFill>
+          <a:ln w="0">
+            <a:noFill/>
+          </a:ln>
+        </p:spPr>
+      </p:sp>
+      <p:sp>
+        <p:nvSpPr>
+          <p:cNvPr id="309" name="WVU DSPIRA gold rule"/>
+          <p:cNvSpPr>
+            <a:spLocks noGrp="1"/>
+          </p:cNvSpPr>
+          <p:nvPr/>
+        </p:nvSpPr>
+        <p:spPr>
+          <a:xfrm>
+            <a:off x="0" y="323850"/>
+            <a:ext cx="9144000" cy="19050"/>
+          </a:xfrm>
+          <a:prstGeom prst="rect">
+            <a:avLst/>
+          </a:prstGeom>
+          <a:solidFill>
+            <a:srgbClr val="EEAA00"/>
+          </a:solidFill>
+          <a:ln w="0">
+            <a:noFill/>
+          </a:ln>
+        </p:spPr>
+      </p:sp>
+      <p:sp>
+        <p:nvSpPr>
+          <p:cNvPr id="310" name="WVU DSPIRA name"/>
+          <p:cNvSpPr>
+            <a:spLocks noGrp="1"/>
+          </p:cNvSpPr>
+          <p:nvPr/>
+        </p:nvSpPr>
+        <p:spPr>
+          <a:xfrm>
+            <a:off x="228600" y="19050"/>
+            <a:ext cx="2857500" cy="257175"/>
+          </a:xfrm>
+          <a:prstGeom prst="rect">
+            <a:avLst/>
+          </a:prstGeom>
+          <a:noFill/>
+          <a:ln w="0">
+            <a:noFill/>
+          </a:ln>
+        </p:spPr>
+        <p:txBody>
+          <a:bodyPr>
+            <a:noAutofit/>
+          </a:bodyPr>
+          <a:lstStyle/>
+          <a:p>
+            <a:pPr>
+              <a:defRPr sz="1600" b="1">
+                <a:solidFill>
+                  <a:srgbClr val="FFFFFF"/>
+                </a:solidFill>
+                <a:latin typeface="Arial"/>
+                <a:ea typeface="Arial"/>
+                <a:cs typeface="Arial"/>
+              </a:defRPr>
+            </a:pPr>
+            <a:r>
+              <a:rPr sz="1600" b="1">
+                <a:solidFill>
+                  <a:srgbClr val="FFFFFF"/>
+                </a:solidFill>
+                <a:latin typeface="Arial"/>
+                <a:ea typeface="Arial"/>
+                <a:cs typeface="Arial"/>
+              </a:rPr>
+              <a:t>WVU DSPIRA</a:t>
+            </a:r>
+          </a:p>
+        </p:txBody>
+      </p:sp>
+      <p:sp>
+        <p:nvSpPr>
+          <p:cNvPr id="311" name="WVU DSPIRA university"/>
+          <p:cNvSpPr>
+            <a:spLocks noGrp="1"/>
+          </p:cNvSpPr>
+          <p:nvPr/>
+        </p:nvSpPr>
+        <p:spPr>
+          <a:xfrm>
+            <a:off x="6286500" y="114300"/>
+            <a:ext cx="2628900" cy="171450"/>
+          </a:xfrm>
+          <a:prstGeom prst="rect">
+            <a:avLst/>
+          </a:prstGeom>
+          <a:noFill/>
+          <a:ln w="0">
+            <a:noFill/>
+          </a:ln>
+        </p:spPr>
+        <p:txBody>
+          <a:bodyPr>
+            <a:noAutofit/>
+          </a:bodyPr>
+          <a:lstStyle/>
+          <a:p>
+            <a:pPr algn="r">
+              <a:defRPr sz="900">
+                <a:solidFill>
+                  <a:srgbClr val="FFFFFF"/>
+                </a:solidFill>
+                <a:latin typeface="Arial"/>
+                <a:ea typeface="Arial"/>
+                <a:cs typeface="Arial"/>
+              </a:defRPr>
+            </a:pPr>
+            <a:r>
+              <a:rPr sz="900">
+                <a:solidFill>
+                  <a:srgbClr val="FFFFFF"/>
+                </a:solidFill>
+                <a:latin typeface="Arial"/>
+                <a:ea typeface="Arial"/>
+                <a:cs typeface="Arial"/>
+              </a:rPr>
+              <a:t>WEST VIRGINIA UNIVERSITY</a:t>
             </a:r>
           </a:p>
         </p:txBody>
@@ -32299,30 +32449,6 @@
       </p:pic>
       <p:sp>
         <p:nvSpPr>
-          <p:cNvPr id="310" name="DSPIRA 1"/>
-          <p:cNvSpPr>
-            <a:spLocks noGrp="1"/>
-          </p:cNvSpPr>
-          <p:nvPr/>
-        </p:nvSpPr>
-        <p:spPr>
-          <a:xfrm>
-            <a:off x="0" y="0"/>
-            <a:ext cx="9144000" cy="342900"/>
-          </a:xfrm>
-          <a:prstGeom prst="rect">
-            <a:avLst/>
-          </a:prstGeom>
-          <a:solidFill>
-            <a:srgbClr val="FFFFFF"/>
-          </a:solidFill>
-          <a:ln w="0">
-            <a:noFill/>
-          </a:ln>
-        </p:spPr>
-      </p:sp>
-      <p:sp>
-        <p:nvSpPr>
           <p:cNvPr id="311" name="DSPIRA 2"/>
           <p:cNvSpPr>
             <a:spLocks noGrp="1"/>
@@ -32344,57 +32470,6 @@
             <a:noFill/>
           </a:ln>
         </p:spPr>
-      </p:sp>
-      <p:sp>
-        <p:nvSpPr>
-          <p:cNvPr id="312" name="DSPIRA 3"/>
-          <p:cNvSpPr>
-            <a:spLocks noGrp="1"/>
-          </p:cNvSpPr>
-          <p:nvPr/>
-        </p:nvSpPr>
-        <p:spPr>
-          <a:xfrm>
-            <a:off x="228600" y="76200"/>
-            <a:ext cx="4762500" cy="228600"/>
-          </a:xfrm>
-          <a:prstGeom prst="rect">
-            <a:avLst/>
-          </a:prstGeom>
-          <a:noFill/>
-          <a:ln w="0">
-            <a:noFill/>
-          </a:ln>
-        </p:spPr>
-        <p:txBody>
-          <a:bodyPr>
-            <a:noAutofit/>
-          </a:bodyPr>
-          <a:lstStyle/>
-          <a:p>
-            <a:pPr>
-              <a:defRPr sz="1200" b="1">
-                <a:solidFill>
-                  <a:srgbClr val="002855"/>
-                </a:solidFill>
-                <a:latin typeface="Arial"/>
-                <a:ea typeface="Arial"/>
-                <a:cs typeface="Arial"/>
-              </a:defRPr>
-            </a:pPr>
-            <a:r>
-              <a:rPr sz="1200" b="1">
-                <a:solidFill>
-                  <a:srgbClr val="002855"/>
-                </a:solidFill>
-                <a:latin typeface="Arial"/>
-                <a:ea typeface="Arial"/>
-                <a:cs typeface="Arial"/>
-              </a:rPr>
-              <a:t>WVU DSPIRA</a:t>
-            </a:r>
-          </a:p>
-        </p:txBody>
       </p:sp>
       <p:sp>
         <p:nvSpPr>
@@ -32494,6 +32569,156 @@
                 <a:cs typeface="Arial"/>
               </a:rPr>
               <a:t>10 of 20</a:t>
+            </a:r>
+          </a:p>
+        </p:txBody>
+      </p:sp>
+      <p:sp>
+        <p:nvSpPr>
+          <p:cNvPr id="315" name="WVU DSPIRA navy band"/>
+          <p:cNvSpPr>
+            <a:spLocks noGrp="1"/>
+          </p:cNvSpPr>
+          <p:nvPr/>
+        </p:nvSpPr>
+        <p:spPr>
+          <a:xfrm>
+            <a:off x="0" y="0"/>
+            <a:ext cx="9144000" cy="323850"/>
+          </a:xfrm>
+          <a:prstGeom prst="rect">
+            <a:avLst/>
+          </a:prstGeom>
+          <a:solidFill>
+            <a:srgbClr val="002855"/>
+          </a:solidFill>
+          <a:ln w="0">
+            <a:noFill/>
+          </a:ln>
+        </p:spPr>
+      </p:sp>
+      <p:sp>
+        <p:nvSpPr>
+          <p:cNvPr id="316" name="WVU DSPIRA gold rule"/>
+          <p:cNvSpPr>
+            <a:spLocks noGrp="1"/>
+          </p:cNvSpPr>
+          <p:nvPr/>
+        </p:nvSpPr>
+        <p:spPr>
+          <a:xfrm>
+            <a:off x="0" y="323850"/>
+            <a:ext cx="9144000" cy="19050"/>
+          </a:xfrm>
+          <a:prstGeom prst="rect">
+            <a:avLst/>
+          </a:prstGeom>
+          <a:solidFill>
+            <a:srgbClr val="EEAA00"/>
+          </a:solidFill>
+          <a:ln w="0">
+            <a:noFill/>
+          </a:ln>
+        </p:spPr>
+      </p:sp>
+      <p:sp>
+        <p:nvSpPr>
+          <p:cNvPr id="317" name="WVU DSPIRA name"/>
+          <p:cNvSpPr>
+            <a:spLocks noGrp="1"/>
+          </p:cNvSpPr>
+          <p:nvPr/>
+        </p:nvSpPr>
+        <p:spPr>
+          <a:xfrm>
+            <a:off x="228600" y="19050"/>
+            <a:ext cx="2857500" cy="257175"/>
+          </a:xfrm>
+          <a:prstGeom prst="rect">
+            <a:avLst/>
+          </a:prstGeom>
+          <a:noFill/>
+          <a:ln w="0">
+            <a:noFill/>
+          </a:ln>
+        </p:spPr>
+        <p:txBody>
+          <a:bodyPr>
+            <a:noAutofit/>
+          </a:bodyPr>
+          <a:lstStyle/>
+          <a:p>
+            <a:pPr>
+              <a:defRPr sz="1600" b="1">
+                <a:solidFill>
+                  <a:srgbClr val="FFFFFF"/>
+                </a:solidFill>
+                <a:latin typeface="Arial"/>
+                <a:ea typeface="Arial"/>
+                <a:cs typeface="Arial"/>
+              </a:defRPr>
+            </a:pPr>
+            <a:r>
+              <a:rPr sz="1600" b="1">
+                <a:solidFill>
+                  <a:srgbClr val="FFFFFF"/>
+                </a:solidFill>
+                <a:latin typeface="Arial"/>
+                <a:ea typeface="Arial"/>
+                <a:cs typeface="Arial"/>
+              </a:rPr>
+              <a:t>WVU DSPIRA</a:t>
+            </a:r>
+          </a:p>
+        </p:txBody>
+      </p:sp>
+      <p:sp>
+        <p:nvSpPr>
+          <p:cNvPr id="318" name="WVU DSPIRA university"/>
+          <p:cNvSpPr>
+            <a:spLocks noGrp="1"/>
+          </p:cNvSpPr>
+          <p:nvPr/>
+        </p:nvSpPr>
+        <p:spPr>
+          <a:xfrm>
+            <a:off x="6286500" y="114300"/>
+            <a:ext cx="2628900" cy="171450"/>
+          </a:xfrm>
+          <a:prstGeom prst="rect">
+            <a:avLst/>
+          </a:prstGeom>
+          <a:noFill/>
+          <a:ln w="0">
+            <a:noFill/>
+          </a:ln>
+        </p:spPr>
+        <p:txBody>
+          <a:bodyPr>
+            <a:noAutofit/>
+          </a:bodyPr>
+          <a:lstStyle/>
+          <a:p>
+            <a:pPr algn="r">
+              <a:defRPr sz="900">
+                <a:solidFill>
+                  <a:srgbClr val="FFFFFF"/>
+                </a:solidFill>
+                <a:latin typeface="Arial"/>
+                <a:ea typeface="Arial"/>
+                <a:cs typeface="Arial"/>
+              </a:defRPr>
+            </a:pPr>
+            <a:r>
+              <a:rPr sz="900">
+                <a:solidFill>
+                  <a:srgbClr val="FFFFFF"/>
+                </a:solidFill>
+                <a:latin typeface="Arial"/>
+                <a:ea typeface="Arial"/>
+                <a:cs typeface="Arial"/>
+              </a:rPr>
+              <a:t>WEST VIRGINIA UNIVERSITY</a:t>
             </a:r>
           </a:p>
         </p:txBody>
@@ -32791,30 +33016,6 @@
       </p:pic>
       <p:sp>
         <p:nvSpPr>
-          <p:cNvPr id="318" name="DSPIRA 1"/>
-          <p:cNvSpPr>
-            <a:spLocks noGrp="1"/>
-          </p:cNvSpPr>
-          <p:nvPr/>
-        </p:nvSpPr>
-        <p:spPr>
-          <a:xfrm>
-            <a:off x="0" y="0"/>
-            <a:ext cx="9144000" cy="342900"/>
-          </a:xfrm>
-          <a:prstGeom prst="rect">
-            <a:avLst/>
-          </a:prstGeom>
-          <a:solidFill>
-            <a:srgbClr val="FFFFFF"/>
-          </a:solidFill>
-          <a:ln w="0">
-            <a:noFill/>
-          </a:ln>
-        </p:spPr>
-      </p:sp>
-      <p:sp>
-        <p:nvSpPr>
           <p:cNvPr id="319" name="DSPIRA 2"/>
           <p:cNvSpPr>
             <a:spLocks noGrp="1"/>
@@ -32836,57 +33037,6 @@
             <a:noFill/>
           </a:ln>
         </p:spPr>
-      </p:sp>
-      <p:sp>
-        <p:nvSpPr>
-          <p:cNvPr id="320" name="DSPIRA 3"/>
-          <p:cNvSpPr>
-            <a:spLocks noGrp="1"/>
-          </p:cNvSpPr>
-          <p:nvPr/>
-        </p:nvSpPr>
-        <p:spPr>
-          <a:xfrm>
-            <a:off x="228600" y="76200"/>
-            <a:ext cx="4762500" cy="228600"/>
-          </a:xfrm>
-          <a:prstGeom prst="rect">
-            <a:avLst/>
-          </a:prstGeom>
-          <a:noFill/>
-          <a:ln w="0">
-            <a:noFill/>
-          </a:ln>
-        </p:spPr>
-        <p:txBody>
-          <a:bodyPr>
-            <a:noAutofit/>
-          </a:bodyPr>
-          <a:lstStyle/>
-          <a:p>
-            <a:pPr>
-              <a:defRPr sz="1200" b="1">
-                <a:solidFill>
-                  <a:srgbClr val="002855"/>
-                </a:solidFill>
-                <a:latin typeface="Arial"/>
-                <a:ea typeface="Arial"/>
-                <a:cs typeface="Arial"/>
-              </a:defRPr>
-            </a:pPr>
-            <a:r>
-              <a:rPr sz="1200" b="1">
-                <a:solidFill>
-                  <a:srgbClr val="002855"/>
-                </a:solidFill>
-                <a:latin typeface="Arial"/>
-                <a:ea typeface="Arial"/>
-                <a:cs typeface="Arial"/>
-              </a:rPr>
-              <a:t>WVU DSPIRA</a:t>
-            </a:r>
-          </a:p>
-        </p:txBody>
       </p:sp>
       <p:sp>
         <p:nvSpPr>
@@ -32986,6 +33136,156 @@
                 <a:cs typeface="Arial"/>
               </a:rPr>
               <a:t>11 of 20</a:t>
+            </a:r>
+          </a:p>
+        </p:txBody>
+      </p:sp>
+      <p:sp>
+        <p:nvSpPr>
+          <p:cNvPr id="323" name="WVU DSPIRA navy band"/>
+          <p:cNvSpPr>
+            <a:spLocks noGrp="1"/>
+          </p:cNvSpPr>
+          <p:nvPr/>
+        </p:nvSpPr>
+        <p:spPr>
+          <a:xfrm>
+            <a:off x="0" y="0"/>
+            <a:ext cx="9144000" cy="323850"/>
+          </a:xfrm>
+          <a:prstGeom prst="rect">
+            <a:avLst/>
+          </a:prstGeom>
+          <a:solidFill>
+            <a:srgbClr val="002855"/>
+          </a:solidFill>
+          <a:ln w="0">
+            <a:noFill/>
+          </a:ln>
+        </p:spPr>
+      </p:sp>
+      <p:sp>
+        <p:nvSpPr>
+          <p:cNvPr id="324" name="WVU DSPIRA gold rule"/>
+          <p:cNvSpPr>
+            <a:spLocks noGrp="1"/>
+          </p:cNvSpPr>
+          <p:nvPr/>
+        </p:nvSpPr>
+        <p:spPr>
+          <a:xfrm>
+            <a:off x="0" y="323850"/>
+            <a:ext cx="9144000" cy="19050"/>
+          </a:xfrm>
+          <a:prstGeom prst="rect">
+            <a:avLst/>
+          </a:prstGeom>
+          <a:solidFill>
+            <a:srgbClr val="EEAA00"/>
+          </a:solidFill>
+          <a:ln w="0">
+            <a:noFill/>
+          </a:ln>
+        </p:spPr>
+      </p:sp>
+      <p:sp>
+        <p:nvSpPr>
+          <p:cNvPr id="325" name="WVU DSPIRA name"/>
+          <p:cNvSpPr>
+            <a:spLocks noGrp="1"/>
+          </p:cNvSpPr>
+          <p:nvPr/>
+        </p:nvSpPr>
+        <p:spPr>
+          <a:xfrm>
+            <a:off x="228600" y="19050"/>
+            <a:ext cx="2857500" cy="257175"/>
+          </a:xfrm>
+          <a:prstGeom prst="rect">
+            <a:avLst/>
+          </a:prstGeom>
+          <a:noFill/>
+          <a:ln w="0">
+            <a:noFill/>
+          </a:ln>
+        </p:spPr>
+        <p:txBody>
+          <a:bodyPr>
+            <a:noAutofit/>
+          </a:bodyPr>
+          <a:lstStyle/>
+          <a:p>
+            <a:pPr>
+              <a:defRPr sz="1600" b="1">
+                <a:solidFill>
+                  <a:srgbClr val="FFFFFF"/>
+                </a:solidFill>
+                <a:latin typeface="Arial"/>
+                <a:ea typeface="Arial"/>
+                <a:cs typeface="Arial"/>
+              </a:defRPr>
+            </a:pPr>
+            <a:r>
+              <a:rPr sz="1600" b="1">
+                <a:solidFill>
+                  <a:srgbClr val="FFFFFF"/>
+                </a:solidFill>
+                <a:latin typeface="Arial"/>
+                <a:ea typeface="Arial"/>
+                <a:cs typeface="Arial"/>
+              </a:rPr>
+              <a:t>WVU DSPIRA</a:t>
+            </a:r>
+          </a:p>
+        </p:txBody>
+      </p:sp>
+      <p:sp>
+        <p:nvSpPr>
+          <p:cNvPr id="326" name="WVU DSPIRA university"/>
+          <p:cNvSpPr>
+            <a:spLocks noGrp="1"/>
+          </p:cNvSpPr>
+          <p:nvPr/>
+        </p:nvSpPr>
+        <p:spPr>
+          <a:xfrm>
+            <a:off x="6286500" y="114300"/>
+            <a:ext cx="2628900" cy="171450"/>
+          </a:xfrm>
+          <a:prstGeom prst="rect">
+            <a:avLst/>
+          </a:prstGeom>
+          <a:noFill/>
+          <a:ln w="0">
+            <a:noFill/>
+          </a:ln>
+        </p:spPr>
+        <p:txBody>
+          <a:bodyPr>
+            <a:noAutofit/>
+          </a:bodyPr>
+          <a:lstStyle/>
+          <a:p>
+            <a:pPr algn="r">
+              <a:defRPr sz="900">
+                <a:solidFill>
+                  <a:srgbClr val="FFFFFF"/>
+                </a:solidFill>
+                <a:latin typeface="Arial"/>
+                <a:ea typeface="Arial"/>
+                <a:cs typeface="Arial"/>
+              </a:defRPr>
+            </a:pPr>
+            <a:r>
+              <a:rPr sz="900">
+                <a:solidFill>
+                  <a:srgbClr val="FFFFFF"/>
+                </a:solidFill>
+                <a:latin typeface="Arial"/>
+                <a:ea typeface="Arial"/>
+                <a:cs typeface="Arial"/>
+              </a:rPr>
+              <a:t>WEST VIRGINIA UNIVERSITY</a:t>
             </a:r>
           </a:p>
         </p:txBody>
@@ -33214,30 +33514,6 @@
       </p:pic>
       <p:sp>
         <p:nvSpPr>
-          <p:cNvPr id="325" name="DSPIRA 1"/>
-          <p:cNvSpPr>
-            <a:spLocks noGrp="1"/>
-          </p:cNvSpPr>
-          <p:nvPr/>
-        </p:nvSpPr>
-        <p:spPr>
-          <a:xfrm>
-            <a:off x="0" y="0"/>
-            <a:ext cx="9144000" cy="342900"/>
-          </a:xfrm>
-          <a:prstGeom prst="rect">
-            <a:avLst/>
-          </a:prstGeom>
-          <a:solidFill>
-            <a:srgbClr val="FFFFFF"/>
-          </a:solidFill>
-          <a:ln w="0">
-            <a:noFill/>
-          </a:ln>
-        </p:spPr>
-      </p:sp>
-      <p:sp>
-        <p:nvSpPr>
           <p:cNvPr id="326" name="DSPIRA 2"/>
           <p:cNvSpPr>
             <a:spLocks noGrp="1"/>
@@ -33259,57 +33535,6 @@
             <a:noFill/>
           </a:ln>
         </p:spPr>
-      </p:sp>
-      <p:sp>
-        <p:nvSpPr>
-          <p:cNvPr id="327" name="DSPIRA 3"/>
-          <p:cNvSpPr>
-            <a:spLocks noGrp="1"/>
-          </p:cNvSpPr>
-          <p:nvPr/>
-        </p:nvSpPr>
-        <p:spPr>
-          <a:xfrm>
-            <a:off x="228600" y="76200"/>
-            <a:ext cx="4762500" cy="228600"/>
-          </a:xfrm>
-          <a:prstGeom prst="rect">
-            <a:avLst/>
-          </a:prstGeom>
-          <a:noFill/>
-          <a:ln w="0">
-            <a:noFill/>
-          </a:ln>
-        </p:spPr>
-        <p:txBody>
-          <a:bodyPr>
-            <a:noAutofit/>
-          </a:bodyPr>
-          <a:lstStyle/>
-          <a:p>
-            <a:pPr>
-              <a:defRPr sz="1200" b="1">
-                <a:solidFill>
-                  <a:srgbClr val="002855"/>
-                </a:solidFill>
-                <a:latin typeface="Arial"/>
-                <a:ea typeface="Arial"/>
-                <a:cs typeface="Arial"/>
-              </a:defRPr>
-            </a:pPr>
-            <a:r>
-              <a:rPr sz="1200" b="1">
-                <a:solidFill>
-                  <a:srgbClr val="002855"/>
-                </a:solidFill>
-                <a:latin typeface="Arial"/>
-                <a:ea typeface="Arial"/>
-                <a:cs typeface="Arial"/>
-              </a:rPr>
-              <a:t>WVU DSPIRA</a:t>
-            </a:r>
-          </a:p>
-        </p:txBody>
       </p:sp>
       <p:sp>
         <p:nvSpPr>
@@ -33409,6 +33634,156 @@
                 <a:cs typeface="Arial"/>
               </a:rPr>
               <a:t>12 of 20</a:t>
+            </a:r>
+          </a:p>
+        </p:txBody>
+      </p:sp>
+      <p:sp>
+        <p:nvSpPr>
+          <p:cNvPr id="330" name="WVU DSPIRA navy band"/>
+          <p:cNvSpPr>
+            <a:spLocks noGrp="1"/>
+          </p:cNvSpPr>
+          <p:nvPr/>
+        </p:nvSpPr>
+        <p:spPr>
+          <a:xfrm>
+            <a:off x="0" y="0"/>
+            <a:ext cx="9144000" cy="323850"/>
+          </a:xfrm>
+          <a:prstGeom prst="rect">
+            <a:avLst/>
+          </a:prstGeom>
+          <a:solidFill>
+            <a:srgbClr val="002855"/>
+          </a:solidFill>
+          <a:ln w="0">
+            <a:noFill/>
+          </a:ln>
+        </p:spPr>
+      </p:sp>
+      <p:sp>
+        <p:nvSpPr>
+          <p:cNvPr id="331" name="WVU DSPIRA gold rule"/>
+          <p:cNvSpPr>
+            <a:spLocks noGrp="1"/>
+          </p:cNvSpPr>
+          <p:nvPr/>
+        </p:nvSpPr>
+        <p:spPr>
+          <a:xfrm>
+            <a:off x="0" y="323850"/>
+            <a:ext cx="9144000" cy="19050"/>
+          </a:xfrm>
+          <a:prstGeom prst="rect">
+            <a:avLst/>
+          </a:prstGeom>
+          <a:solidFill>
+            <a:srgbClr val="EEAA00"/>
+          </a:solidFill>
+          <a:ln w="0">
+            <a:noFill/>
+          </a:ln>
+        </p:spPr>
+      </p:sp>
+      <p:sp>
+        <p:nvSpPr>
+          <p:cNvPr id="332" name="WVU DSPIRA name"/>
+          <p:cNvSpPr>
+            <a:spLocks noGrp="1"/>
+          </p:cNvSpPr>
+          <p:nvPr/>
+        </p:nvSpPr>
+        <p:spPr>
+          <a:xfrm>
+            <a:off x="228600" y="19050"/>
+            <a:ext cx="2857500" cy="257175"/>
+          </a:xfrm>
+          <a:prstGeom prst="rect">
+            <a:avLst/>
+          </a:prstGeom>
+          <a:noFill/>
+          <a:ln w="0">
+            <a:noFill/>
+          </a:ln>
+        </p:spPr>
+        <p:txBody>
+          <a:bodyPr>
+            <a:noAutofit/>
+          </a:bodyPr>
+          <a:lstStyle/>
+          <a:p>
+            <a:pPr>
+              <a:defRPr sz="1600" b="1">
+                <a:solidFill>
+                  <a:srgbClr val="FFFFFF"/>
+                </a:solidFill>
+                <a:latin typeface="Arial"/>
+                <a:ea typeface="Arial"/>
+                <a:cs typeface="Arial"/>
+              </a:defRPr>
+            </a:pPr>
+            <a:r>
+              <a:rPr sz="1600" b="1">
+                <a:solidFill>
+                  <a:srgbClr val="FFFFFF"/>
+                </a:solidFill>
+                <a:latin typeface="Arial"/>
+                <a:ea typeface="Arial"/>
+                <a:cs typeface="Arial"/>
+              </a:rPr>
+              <a:t>WVU DSPIRA</a:t>
+            </a:r>
+          </a:p>
+        </p:txBody>
+      </p:sp>
+      <p:sp>
+        <p:nvSpPr>
+          <p:cNvPr id="333" name="WVU DSPIRA university"/>
+          <p:cNvSpPr>
+            <a:spLocks noGrp="1"/>
+          </p:cNvSpPr>
+          <p:nvPr/>
+        </p:nvSpPr>
+        <p:spPr>
+          <a:xfrm>
+            <a:off x="6286500" y="114300"/>
+            <a:ext cx="2628900" cy="171450"/>
+          </a:xfrm>
+          <a:prstGeom prst="rect">
+            <a:avLst/>
+          </a:prstGeom>
+          <a:noFill/>
+          <a:ln w="0">
+            <a:noFill/>
+          </a:ln>
+        </p:spPr>
+        <p:txBody>
+          <a:bodyPr>
+            <a:noAutofit/>
+          </a:bodyPr>
+          <a:lstStyle/>
+          <a:p>
+            <a:pPr algn="r">
+              <a:defRPr sz="900">
+                <a:solidFill>
+                  <a:srgbClr val="FFFFFF"/>
+                </a:solidFill>
+                <a:latin typeface="Arial"/>
+                <a:ea typeface="Arial"/>
+                <a:cs typeface="Arial"/>
+              </a:defRPr>
+            </a:pPr>
+            <a:r>
+              <a:rPr sz="900">
+                <a:solidFill>
+                  <a:srgbClr val="FFFFFF"/>
+                </a:solidFill>
+                <a:latin typeface="Arial"/>
+                <a:ea typeface="Arial"/>
+                <a:cs typeface="Arial"/>
+              </a:rPr>
+              <a:t>WEST VIRGINIA UNIVERSITY</a:t>
             </a:r>
           </a:p>
         </p:txBody>
@@ -33568,30 +33943,6 @@
       </p:sp>
       <p:sp>
         <p:nvSpPr>
-          <p:cNvPr id="332" name="DSPIRA 1"/>
-          <p:cNvSpPr>
-            <a:spLocks noGrp="1"/>
-          </p:cNvSpPr>
-          <p:nvPr/>
-        </p:nvSpPr>
-        <p:spPr>
-          <a:xfrm>
-            <a:off x="0" y="0"/>
-            <a:ext cx="9144000" cy="342900"/>
-          </a:xfrm>
-          <a:prstGeom prst="rect">
-            <a:avLst/>
-          </a:prstGeom>
-          <a:solidFill>
-            <a:srgbClr val="FFFFFF"/>
-          </a:solidFill>
-          <a:ln w="0">
-            <a:noFill/>
-          </a:ln>
-        </p:spPr>
-      </p:sp>
-      <p:sp>
-        <p:nvSpPr>
           <p:cNvPr id="333" name="DSPIRA 2"/>
           <p:cNvSpPr>
             <a:spLocks noGrp="1"/>
@@ -33613,57 +33964,6 @@
             <a:noFill/>
           </a:ln>
         </p:spPr>
-      </p:sp>
-      <p:sp>
-        <p:nvSpPr>
-          <p:cNvPr id="334" name="DSPIRA 3"/>
-          <p:cNvSpPr>
-            <a:spLocks noGrp="1"/>
-          </p:cNvSpPr>
-          <p:nvPr/>
-        </p:nvSpPr>
-        <p:spPr>
-          <a:xfrm>
-            <a:off x="228600" y="76200"/>
-            <a:ext cx="4762500" cy="228600"/>
-          </a:xfrm>
-          <a:prstGeom prst="rect">
-            <a:avLst/>
-          </a:prstGeom>
-          <a:noFill/>
-          <a:ln w="0">
-            <a:noFill/>
-          </a:ln>
-        </p:spPr>
-        <p:txBody>
-          <a:bodyPr>
-            <a:noAutofit/>
-          </a:bodyPr>
-          <a:lstStyle/>
-          <a:p>
-            <a:pPr>
-              <a:defRPr sz="1200" b="1">
-                <a:solidFill>
-                  <a:srgbClr val="002855"/>
-                </a:solidFill>
-                <a:latin typeface="Arial"/>
-                <a:ea typeface="Arial"/>
-                <a:cs typeface="Arial"/>
-              </a:defRPr>
-            </a:pPr>
-            <a:r>
-              <a:rPr sz="1200" b="1">
-                <a:solidFill>
-                  <a:srgbClr val="002855"/>
-                </a:solidFill>
-                <a:latin typeface="Arial"/>
-                <a:ea typeface="Arial"/>
-                <a:cs typeface="Arial"/>
-              </a:rPr>
-              <a:t>WVU DSPIRA</a:t>
-            </a:r>
-          </a:p>
-        </p:txBody>
       </p:sp>
       <p:sp>
         <p:nvSpPr>
@@ -33763,6 +34063,156 @@
                 <a:cs typeface="Arial"/>
               </a:rPr>
               <a:t>13 of 20</a:t>
+            </a:r>
+          </a:p>
+        </p:txBody>
+      </p:sp>
+      <p:sp>
+        <p:nvSpPr>
+          <p:cNvPr id="337" name="WVU DSPIRA navy band"/>
+          <p:cNvSpPr>
+            <a:spLocks noGrp="1"/>
+          </p:cNvSpPr>
+          <p:nvPr/>
+        </p:nvSpPr>
+        <p:spPr>
+          <a:xfrm>
+            <a:off x="0" y="0"/>
+            <a:ext cx="9144000" cy="323850"/>
+          </a:xfrm>
+          <a:prstGeom prst="rect">
+            <a:avLst/>
+          </a:prstGeom>
+          <a:solidFill>
+            <a:srgbClr val="002855"/>
+          </a:solidFill>
+          <a:ln w="0">
+            <a:noFill/>
+          </a:ln>
+        </p:spPr>
+      </p:sp>
+      <p:sp>
+        <p:nvSpPr>
+          <p:cNvPr id="338" name="WVU DSPIRA gold rule"/>
+          <p:cNvSpPr>
+            <a:spLocks noGrp="1"/>
+          </p:cNvSpPr>
+          <p:nvPr/>
+        </p:nvSpPr>
+        <p:spPr>
+          <a:xfrm>
+            <a:off x="0" y="323850"/>
+            <a:ext cx="9144000" cy="19050"/>
+          </a:xfrm>
+          <a:prstGeom prst="rect">
+            <a:avLst/>
+          </a:prstGeom>
+          <a:solidFill>
+            <a:srgbClr val="EEAA00"/>
+          </a:solidFill>
+          <a:ln w="0">
+            <a:noFill/>
+          </a:ln>
+        </p:spPr>
+      </p:sp>
+      <p:sp>
+        <p:nvSpPr>
+          <p:cNvPr id="339" name="WVU DSPIRA name"/>
+          <p:cNvSpPr>
+            <a:spLocks noGrp="1"/>
+          </p:cNvSpPr>
+          <p:nvPr/>
+        </p:nvSpPr>
+        <p:spPr>
+          <a:xfrm>
+            <a:off x="228600" y="19050"/>
+            <a:ext cx="2857500" cy="257175"/>
+          </a:xfrm>
+          <a:prstGeom prst="rect">
+            <a:avLst/>
+          </a:prstGeom>
+          <a:noFill/>
+          <a:ln w="0">
+            <a:noFill/>
+          </a:ln>
+        </p:spPr>
+        <p:txBody>
+          <a:bodyPr>
+            <a:noAutofit/>
+          </a:bodyPr>
+          <a:lstStyle/>
+          <a:p>
+            <a:pPr>
+              <a:defRPr sz="1600" b="1">
+                <a:solidFill>
+                  <a:srgbClr val="FFFFFF"/>
+                </a:solidFill>
+                <a:latin typeface="Arial"/>
+                <a:ea typeface="Arial"/>
+                <a:cs typeface="Arial"/>
+              </a:defRPr>
+            </a:pPr>
+            <a:r>
+              <a:rPr sz="1600" b="1">
+                <a:solidFill>
+                  <a:srgbClr val="FFFFFF"/>
+                </a:solidFill>
+                <a:latin typeface="Arial"/>
+                <a:ea typeface="Arial"/>
+                <a:cs typeface="Arial"/>
+              </a:rPr>
+              <a:t>WVU DSPIRA</a:t>
+            </a:r>
+          </a:p>
+        </p:txBody>
+      </p:sp>
+      <p:sp>
+        <p:nvSpPr>
+          <p:cNvPr id="340" name="WVU DSPIRA university"/>
+          <p:cNvSpPr>
+            <a:spLocks noGrp="1"/>
+          </p:cNvSpPr>
+          <p:nvPr/>
+        </p:nvSpPr>
+        <p:spPr>
+          <a:xfrm>
+            <a:off x="6286500" y="114300"/>
+            <a:ext cx="2628900" cy="171450"/>
+          </a:xfrm>
+          <a:prstGeom prst="rect">
+            <a:avLst/>
+          </a:prstGeom>
+          <a:noFill/>
+          <a:ln w="0">
+            <a:noFill/>
+          </a:ln>
+        </p:spPr>
+        <p:txBody>
+          <a:bodyPr>
+            <a:noAutofit/>
+          </a:bodyPr>
+          <a:lstStyle/>
+          <a:p>
+            <a:pPr algn="r">
+              <a:defRPr sz="900">
+                <a:solidFill>
+                  <a:srgbClr val="FFFFFF"/>
+                </a:solidFill>
+                <a:latin typeface="Arial"/>
+                <a:ea typeface="Arial"/>
+                <a:cs typeface="Arial"/>
+              </a:defRPr>
+            </a:pPr>
+            <a:r>
+              <a:rPr sz="900">
+                <a:solidFill>
+                  <a:srgbClr val="FFFFFF"/>
+                </a:solidFill>
+                <a:latin typeface="Arial"/>
+                <a:ea typeface="Arial"/>
+                <a:cs typeface="Arial"/>
+              </a:rPr>
+              <a:t>WEST VIRGINIA UNIVERSITY</a:t>
             </a:r>
           </a:p>
         </p:txBody>
@@ -33940,30 +34390,6 @@
       </p:pic>
       <p:sp>
         <p:nvSpPr>
-          <p:cNvPr id="339" name="DSPIRA 1"/>
-          <p:cNvSpPr>
-            <a:spLocks noGrp="1"/>
-          </p:cNvSpPr>
-          <p:nvPr/>
-        </p:nvSpPr>
-        <p:spPr>
-          <a:xfrm>
-            <a:off x="0" y="0"/>
-            <a:ext cx="9144000" cy="342900"/>
-          </a:xfrm>
-          <a:prstGeom prst="rect">
-            <a:avLst/>
-          </a:prstGeom>
-          <a:solidFill>
-            <a:srgbClr val="FFFFFF"/>
-          </a:solidFill>
-          <a:ln w="0">
-            <a:noFill/>
-          </a:ln>
-        </p:spPr>
-      </p:sp>
-      <p:sp>
-        <p:nvSpPr>
           <p:cNvPr id="340" name="DSPIRA 2"/>
           <p:cNvSpPr>
             <a:spLocks noGrp="1"/>
@@ -33985,57 +34411,6 @@
             <a:noFill/>
           </a:ln>
         </p:spPr>
-      </p:sp>
-      <p:sp>
-        <p:nvSpPr>
-          <p:cNvPr id="341" name="DSPIRA 3"/>
-          <p:cNvSpPr>
-            <a:spLocks noGrp="1"/>
-          </p:cNvSpPr>
-          <p:nvPr/>
-        </p:nvSpPr>
-        <p:spPr>
-          <a:xfrm>
-            <a:off x="228600" y="76200"/>
-            <a:ext cx="4762500" cy="228600"/>
-          </a:xfrm>
-          <a:prstGeom prst="rect">
-            <a:avLst/>
-          </a:prstGeom>
-          <a:noFill/>
-          <a:ln w="0">
-            <a:noFill/>
-          </a:ln>
-        </p:spPr>
-        <p:txBody>
-          <a:bodyPr>
-            <a:noAutofit/>
-          </a:bodyPr>
-          <a:lstStyle/>
-          <a:p>
-            <a:pPr>
-              <a:defRPr sz="1200" b="1">
-                <a:solidFill>
-                  <a:srgbClr val="002855"/>
-                </a:solidFill>
-                <a:latin typeface="Arial"/>
-                <a:ea typeface="Arial"/>
-                <a:cs typeface="Arial"/>
-              </a:defRPr>
-            </a:pPr>
-            <a:r>
-              <a:rPr sz="1200" b="1">
-                <a:solidFill>
-                  <a:srgbClr val="002855"/>
-                </a:solidFill>
-                <a:latin typeface="Arial"/>
-                <a:ea typeface="Arial"/>
-                <a:cs typeface="Arial"/>
-              </a:rPr>
-              <a:t>WVU DSPIRA</a:t>
-            </a:r>
-          </a:p>
-        </p:txBody>
       </p:sp>
       <p:sp>
         <p:nvSpPr>
@@ -34135,6 +34510,156 @@
                 <a:cs typeface="Arial"/>
               </a:rPr>
               <a:t>Supplemental</a:t>
+            </a:r>
+          </a:p>
+        </p:txBody>
+      </p:sp>
+      <p:sp>
+        <p:nvSpPr>
+          <p:cNvPr id="344" name="WVU DSPIRA navy band"/>
+          <p:cNvSpPr>
+            <a:spLocks noGrp="1"/>
+          </p:cNvSpPr>
+          <p:nvPr/>
+        </p:nvSpPr>
+        <p:spPr>
+          <a:xfrm>
+            <a:off x="0" y="0"/>
+            <a:ext cx="9144000" cy="323850"/>
+          </a:xfrm>
+          <a:prstGeom prst="rect">
+            <a:avLst/>
+          </a:prstGeom>
+          <a:solidFill>
+            <a:srgbClr val="002855"/>
+          </a:solidFill>
+          <a:ln w="0">
+            <a:noFill/>
+          </a:ln>
+        </p:spPr>
+      </p:sp>
+      <p:sp>
+        <p:nvSpPr>
+          <p:cNvPr id="345" name="WVU DSPIRA gold rule"/>
+          <p:cNvSpPr>
+            <a:spLocks noGrp="1"/>
+          </p:cNvSpPr>
+          <p:nvPr/>
+        </p:nvSpPr>
+        <p:spPr>
+          <a:xfrm>
+            <a:off x="0" y="323850"/>
+            <a:ext cx="9144000" cy="19050"/>
+          </a:xfrm>
+          <a:prstGeom prst="rect">
+            <a:avLst/>
+          </a:prstGeom>
+          <a:solidFill>
+            <a:srgbClr val="EEAA00"/>
+          </a:solidFill>
+          <a:ln w="0">
+            <a:noFill/>
+          </a:ln>
+        </p:spPr>
+      </p:sp>
+      <p:sp>
+        <p:nvSpPr>
+          <p:cNvPr id="346" name="WVU DSPIRA name"/>
+          <p:cNvSpPr>
+            <a:spLocks noGrp="1"/>
+          </p:cNvSpPr>
+          <p:nvPr/>
+        </p:nvSpPr>
+        <p:spPr>
+          <a:xfrm>
+            <a:off x="228600" y="19050"/>
+            <a:ext cx="2857500" cy="257175"/>
+          </a:xfrm>
+          <a:prstGeom prst="rect">
+            <a:avLst/>
+          </a:prstGeom>
+          <a:noFill/>
+          <a:ln w="0">
+            <a:noFill/>
+          </a:ln>
+        </p:spPr>
+        <p:txBody>
+          <a:bodyPr>
+            <a:noAutofit/>
+          </a:bodyPr>
+          <a:lstStyle/>
+          <a:p>
+            <a:pPr>
+              <a:defRPr sz="1600" b="1">
+                <a:solidFill>
+                  <a:srgbClr val="FFFFFF"/>
+                </a:solidFill>
+                <a:latin typeface="Arial"/>
+                <a:ea typeface="Arial"/>
+                <a:cs typeface="Arial"/>
+              </a:defRPr>
+            </a:pPr>
+            <a:r>
+              <a:rPr sz="1600" b="1">
+                <a:solidFill>
+                  <a:srgbClr val="FFFFFF"/>
+                </a:solidFill>
+                <a:latin typeface="Arial"/>
+                <a:ea typeface="Arial"/>
+                <a:cs typeface="Arial"/>
+              </a:rPr>
+              <a:t>WVU DSPIRA</a:t>
+            </a:r>
+          </a:p>
+        </p:txBody>
+      </p:sp>
+      <p:sp>
+        <p:nvSpPr>
+          <p:cNvPr id="347" name="WVU DSPIRA university"/>
+          <p:cNvSpPr>
+            <a:spLocks noGrp="1"/>
+          </p:cNvSpPr>
+          <p:nvPr/>
+        </p:nvSpPr>
+        <p:spPr>
+          <a:xfrm>
+            <a:off x="6286500" y="114300"/>
+            <a:ext cx="2628900" cy="171450"/>
+          </a:xfrm>
+          <a:prstGeom prst="rect">
+            <a:avLst/>
+          </a:prstGeom>
+          <a:noFill/>
+          <a:ln w="0">
+            <a:noFill/>
+          </a:ln>
+        </p:spPr>
+        <p:txBody>
+          <a:bodyPr>
+            <a:noAutofit/>
+          </a:bodyPr>
+          <a:lstStyle/>
+          <a:p>
+            <a:pPr algn="r">
+              <a:defRPr sz="900">
+                <a:solidFill>
+                  <a:srgbClr val="FFFFFF"/>
+                </a:solidFill>
+                <a:latin typeface="Arial"/>
+                <a:ea typeface="Arial"/>
+                <a:cs typeface="Arial"/>
+              </a:defRPr>
+            </a:pPr>
+            <a:r>
+              <a:rPr sz="900">
+                <a:solidFill>
+                  <a:srgbClr val="FFFFFF"/>
+                </a:solidFill>
+                <a:latin typeface="Arial"/>
+                <a:ea typeface="Arial"/>
+                <a:cs typeface="Arial"/>
+              </a:rPr>
+              <a:t>WEST VIRGINIA UNIVERSITY</a:t>
             </a:r>
           </a:p>
         </p:txBody>
@@ -34275,30 +34800,6 @@
       </p:pic>
       <p:sp>
         <p:nvSpPr>
-          <p:cNvPr id="346" name="DSPIRA 1"/>
-          <p:cNvSpPr>
-            <a:spLocks noGrp="1"/>
-          </p:cNvSpPr>
-          <p:nvPr/>
-        </p:nvSpPr>
-        <p:spPr>
-          <a:xfrm>
-            <a:off x="0" y="0"/>
-            <a:ext cx="9144000" cy="342900"/>
-          </a:xfrm>
-          <a:prstGeom prst="rect">
-            <a:avLst/>
-          </a:prstGeom>
-          <a:solidFill>
-            <a:srgbClr val="FFFFFF"/>
-          </a:solidFill>
-          <a:ln w="0">
-            <a:noFill/>
-          </a:ln>
-        </p:spPr>
-      </p:sp>
-      <p:sp>
-        <p:nvSpPr>
           <p:cNvPr id="347" name="DSPIRA 2"/>
           <p:cNvSpPr>
             <a:spLocks noGrp="1"/>
@@ -34320,57 +34821,6 @@
             <a:noFill/>
           </a:ln>
         </p:spPr>
-      </p:sp>
-      <p:sp>
-        <p:nvSpPr>
-          <p:cNvPr id="348" name="DSPIRA 3"/>
-          <p:cNvSpPr>
-            <a:spLocks noGrp="1"/>
-          </p:cNvSpPr>
-          <p:nvPr/>
-        </p:nvSpPr>
-        <p:spPr>
-          <a:xfrm>
-            <a:off x="228600" y="76200"/>
-            <a:ext cx="4762500" cy="228600"/>
-          </a:xfrm>
-          <a:prstGeom prst="rect">
-            <a:avLst/>
-          </a:prstGeom>
-          <a:noFill/>
-          <a:ln w="0">
-            <a:noFill/>
-          </a:ln>
-        </p:spPr>
-        <p:txBody>
-          <a:bodyPr>
-            <a:noAutofit/>
-          </a:bodyPr>
-          <a:lstStyle/>
-          <a:p>
-            <a:pPr>
-              <a:defRPr sz="1200" b="1">
-                <a:solidFill>
-                  <a:srgbClr val="002855"/>
-                </a:solidFill>
-                <a:latin typeface="Arial"/>
-                <a:ea typeface="Arial"/>
-                <a:cs typeface="Arial"/>
-              </a:defRPr>
-            </a:pPr>
-            <a:r>
-              <a:rPr sz="1200" b="1">
-                <a:solidFill>
-                  <a:srgbClr val="002855"/>
-                </a:solidFill>
-                <a:latin typeface="Arial"/>
-                <a:ea typeface="Arial"/>
-                <a:cs typeface="Arial"/>
-              </a:rPr>
-              <a:t>WVU DSPIRA</a:t>
-            </a:r>
-          </a:p>
-        </p:txBody>
       </p:sp>
       <p:sp>
         <p:nvSpPr>
@@ -34470,6 +34920,156 @@
                 <a:cs typeface="Arial"/>
               </a:rPr>
               <a:t>14 of 20</a:t>
+            </a:r>
+          </a:p>
+        </p:txBody>
+      </p:sp>
+      <p:sp>
+        <p:nvSpPr>
+          <p:cNvPr id="351" name="WVU DSPIRA navy band"/>
+          <p:cNvSpPr>
+            <a:spLocks noGrp="1"/>
+          </p:cNvSpPr>
+          <p:nvPr/>
+        </p:nvSpPr>
+        <p:spPr>
+          <a:xfrm>
+            <a:off x="0" y="0"/>
+            <a:ext cx="9144000" cy="323850"/>
+          </a:xfrm>
+          <a:prstGeom prst="rect">
+            <a:avLst/>
+          </a:prstGeom>
+          <a:solidFill>
+            <a:srgbClr val="002855"/>
+          </a:solidFill>
+          <a:ln w="0">
+            <a:noFill/>
+          </a:ln>
+        </p:spPr>
+      </p:sp>
+      <p:sp>
+        <p:nvSpPr>
+          <p:cNvPr id="352" name="WVU DSPIRA gold rule"/>
+          <p:cNvSpPr>
+            <a:spLocks noGrp="1"/>
+          </p:cNvSpPr>
+          <p:nvPr/>
+        </p:nvSpPr>
+        <p:spPr>
+          <a:xfrm>
+            <a:off x="0" y="323850"/>
+            <a:ext cx="9144000" cy="19050"/>
+          </a:xfrm>
+          <a:prstGeom prst="rect">
+            <a:avLst/>
+          </a:prstGeom>
+          <a:solidFill>
+            <a:srgbClr val="EEAA00"/>
+          </a:solidFill>
+          <a:ln w="0">
+            <a:noFill/>
+          </a:ln>
+        </p:spPr>
+      </p:sp>
+      <p:sp>
+        <p:nvSpPr>
+          <p:cNvPr id="353" name="WVU DSPIRA name"/>
+          <p:cNvSpPr>
+            <a:spLocks noGrp="1"/>
+          </p:cNvSpPr>
+          <p:nvPr/>
+        </p:nvSpPr>
+        <p:spPr>
+          <a:xfrm>
+            <a:off x="228600" y="19050"/>
+            <a:ext cx="2857500" cy="257175"/>
+          </a:xfrm>
+          <a:prstGeom prst="rect">
+            <a:avLst/>
+          </a:prstGeom>
+          <a:noFill/>
+          <a:ln w="0">
+            <a:noFill/>
+          </a:ln>
+        </p:spPr>
+        <p:txBody>
+          <a:bodyPr>
+            <a:noAutofit/>
+          </a:bodyPr>
+          <a:lstStyle/>
+          <a:p>
+            <a:pPr>
+              <a:defRPr sz="1600" b="1">
+                <a:solidFill>
+                  <a:srgbClr val="FFFFFF"/>
+                </a:solidFill>
+                <a:latin typeface="Arial"/>
+                <a:ea typeface="Arial"/>
+                <a:cs typeface="Arial"/>
+              </a:defRPr>
+            </a:pPr>
+            <a:r>
+              <a:rPr sz="1600" b="1">
+                <a:solidFill>
+                  <a:srgbClr val="FFFFFF"/>
+                </a:solidFill>
+                <a:latin typeface="Arial"/>
+                <a:ea typeface="Arial"/>
+                <a:cs typeface="Arial"/>
+              </a:rPr>
+              <a:t>WVU DSPIRA</a:t>
+            </a:r>
+          </a:p>
+        </p:txBody>
+      </p:sp>
+      <p:sp>
+        <p:nvSpPr>
+          <p:cNvPr id="354" name="WVU DSPIRA university"/>
+          <p:cNvSpPr>
+            <a:spLocks noGrp="1"/>
+          </p:cNvSpPr>
+          <p:nvPr/>
+        </p:nvSpPr>
+        <p:spPr>
+          <a:xfrm>
+            <a:off x="6286500" y="114300"/>
+            <a:ext cx="2628900" cy="171450"/>
+          </a:xfrm>
+          <a:prstGeom prst="rect">
+            <a:avLst/>
+          </a:prstGeom>
+          <a:noFill/>
+          <a:ln w="0">
+            <a:noFill/>
+          </a:ln>
+        </p:spPr>
+        <p:txBody>
+          <a:bodyPr>
+            <a:noAutofit/>
+          </a:bodyPr>
+          <a:lstStyle/>
+          <a:p>
+            <a:pPr algn="r">
+              <a:defRPr sz="900">
+                <a:solidFill>
+                  <a:srgbClr val="FFFFFF"/>
+                </a:solidFill>
+                <a:latin typeface="Arial"/>
+                <a:ea typeface="Arial"/>
+                <a:cs typeface="Arial"/>
+              </a:defRPr>
+            </a:pPr>
+            <a:r>
+              <a:rPr sz="900">
+                <a:solidFill>
+                  <a:srgbClr val="FFFFFF"/>
+                </a:solidFill>
+                <a:latin typeface="Arial"/>
+                <a:ea typeface="Arial"/>
+                <a:cs typeface="Arial"/>
+              </a:rPr>
+              <a:t>WEST VIRGINIA UNIVERSITY</a:t>
             </a:r>
           </a:p>
         </p:txBody>
@@ -34650,30 +35250,6 @@
       </p:pic>
       <p:sp>
         <p:nvSpPr>
-          <p:cNvPr id="353" name="DSPIRA 1"/>
-          <p:cNvSpPr>
-            <a:spLocks noGrp="1"/>
-          </p:cNvSpPr>
-          <p:nvPr/>
-        </p:nvSpPr>
-        <p:spPr>
-          <a:xfrm>
-            <a:off x="0" y="0"/>
-            <a:ext cx="9144000" cy="342900"/>
-          </a:xfrm>
-          <a:prstGeom prst="rect">
-            <a:avLst/>
-          </a:prstGeom>
-          <a:solidFill>
-            <a:srgbClr val="FFFFFF"/>
-          </a:solidFill>
-          <a:ln w="0">
-            <a:noFill/>
-          </a:ln>
-        </p:spPr>
-      </p:sp>
-      <p:sp>
-        <p:nvSpPr>
           <p:cNvPr id="354" name="DSPIRA 2"/>
           <p:cNvSpPr>
             <a:spLocks noGrp="1"/>
@@ -34695,57 +35271,6 @@
             <a:noFill/>
           </a:ln>
         </p:spPr>
-      </p:sp>
-      <p:sp>
-        <p:nvSpPr>
-          <p:cNvPr id="355" name="DSPIRA 3"/>
-          <p:cNvSpPr>
-            <a:spLocks noGrp="1"/>
-          </p:cNvSpPr>
-          <p:nvPr/>
-        </p:nvSpPr>
-        <p:spPr>
-          <a:xfrm>
-            <a:off x="228600" y="76200"/>
-            <a:ext cx="4762500" cy="228600"/>
-          </a:xfrm>
-          <a:prstGeom prst="rect">
-            <a:avLst/>
-          </a:prstGeom>
-          <a:noFill/>
-          <a:ln w="0">
-            <a:noFill/>
-          </a:ln>
-        </p:spPr>
-        <p:txBody>
-          <a:bodyPr>
-            <a:noAutofit/>
-          </a:bodyPr>
-          <a:lstStyle/>
-          <a:p>
-            <a:pPr>
-              <a:defRPr sz="1200" b="1">
-                <a:solidFill>
-                  <a:srgbClr val="002855"/>
-                </a:solidFill>
-                <a:latin typeface="Arial"/>
-                <a:ea typeface="Arial"/>
-                <a:cs typeface="Arial"/>
-              </a:defRPr>
-            </a:pPr>
-            <a:r>
-              <a:rPr sz="1200" b="1">
-                <a:solidFill>
-                  <a:srgbClr val="002855"/>
-                </a:solidFill>
-                <a:latin typeface="Arial"/>
-                <a:ea typeface="Arial"/>
-                <a:cs typeface="Arial"/>
-              </a:rPr>
-              <a:t>WVU DSPIRA</a:t>
-            </a:r>
-          </a:p>
-        </p:txBody>
       </p:sp>
       <p:sp>
         <p:nvSpPr>
@@ -34845,6 +35370,156 @@
                 <a:cs typeface="Arial"/>
               </a:rPr>
               <a:t>15 of 20</a:t>
+            </a:r>
+          </a:p>
+        </p:txBody>
+      </p:sp>
+      <p:sp>
+        <p:nvSpPr>
+          <p:cNvPr id="358" name="WVU DSPIRA navy band"/>
+          <p:cNvSpPr>
+            <a:spLocks noGrp="1"/>
+          </p:cNvSpPr>
+          <p:nvPr/>
+        </p:nvSpPr>
+        <p:spPr>
+          <a:xfrm>
+            <a:off x="0" y="0"/>
+            <a:ext cx="9144000" cy="323850"/>
+          </a:xfrm>
+          <a:prstGeom prst="rect">
+            <a:avLst/>
+          </a:prstGeom>
+          <a:solidFill>
+            <a:srgbClr val="002855"/>
+          </a:solidFill>
+          <a:ln w="0">
+            <a:noFill/>
+          </a:ln>
+        </p:spPr>
+      </p:sp>
+      <p:sp>
+        <p:nvSpPr>
+          <p:cNvPr id="359" name="WVU DSPIRA gold rule"/>
+          <p:cNvSpPr>
+            <a:spLocks noGrp="1"/>
+          </p:cNvSpPr>
+          <p:nvPr/>
+        </p:nvSpPr>
+        <p:spPr>
+          <a:xfrm>
+            <a:off x="0" y="323850"/>
+            <a:ext cx="9144000" cy="19050"/>
+          </a:xfrm>
+          <a:prstGeom prst="rect">
+            <a:avLst/>
+          </a:prstGeom>
+          <a:solidFill>
+            <a:srgbClr val="EEAA00"/>
+          </a:solidFill>
+          <a:ln w="0">
+            <a:noFill/>
+          </a:ln>
+        </p:spPr>
+      </p:sp>
+      <p:sp>
+        <p:nvSpPr>
+          <p:cNvPr id="360" name="WVU DSPIRA name"/>
+          <p:cNvSpPr>
+            <a:spLocks noGrp="1"/>
+          </p:cNvSpPr>
+          <p:nvPr/>
+        </p:nvSpPr>
+        <p:spPr>
+          <a:xfrm>
+            <a:off x="228600" y="19050"/>
+            <a:ext cx="2857500" cy="257175"/>
+          </a:xfrm>
+          <a:prstGeom prst="rect">
+            <a:avLst/>
+          </a:prstGeom>
+          <a:noFill/>
+          <a:ln w="0">
+            <a:noFill/>
+          </a:ln>
+        </p:spPr>
+        <p:txBody>
+          <a:bodyPr>
+            <a:noAutofit/>
+          </a:bodyPr>
+          <a:lstStyle/>
+          <a:p>
+            <a:pPr>
+              <a:defRPr sz="1600" b="1">
+                <a:solidFill>
+                  <a:srgbClr val="FFFFFF"/>
+                </a:solidFill>
+                <a:latin typeface="Arial"/>
+                <a:ea typeface="Arial"/>
+                <a:cs typeface="Arial"/>
+              </a:defRPr>
+            </a:pPr>
+            <a:r>
+              <a:rPr sz="1600" b="1">
+                <a:solidFill>
+                  <a:srgbClr val="FFFFFF"/>
+                </a:solidFill>
+                <a:latin typeface="Arial"/>
+                <a:ea typeface="Arial"/>
+                <a:cs typeface="Arial"/>
+              </a:rPr>
+              <a:t>WVU DSPIRA</a:t>
+            </a:r>
+          </a:p>
+        </p:txBody>
+      </p:sp>
+      <p:sp>
+        <p:nvSpPr>
+          <p:cNvPr id="361" name="WVU DSPIRA university"/>
+          <p:cNvSpPr>
+            <a:spLocks noGrp="1"/>
+          </p:cNvSpPr>
+          <p:nvPr/>
+        </p:nvSpPr>
+        <p:spPr>
+          <a:xfrm>
+            <a:off x="6286500" y="114300"/>
+            <a:ext cx="2628900" cy="171450"/>
+          </a:xfrm>
+          <a:prstGeom prst="rect">
+            <a:avLst/>
+          </a:prstGeom>
+          <a:noFill/>
+          <a:ln w="0">
+            <a:noFill/>
+          </a:ln>
+        </p:spPr>
+        <p:txBody>
+          <a:bodyPr>
+            <a:noAutofit/>
+          </a:bodyPr>
+          <a:lstStyle/>
+          <a:p>
+            <a:pPr algn="r">
+              <a:defRPr sz="900">
+                <a:solidFill>
+                  <a:srgbClr val="FFFFFF"/>
+                </a:solidFill>
+                <a:latin typeface="Arial"/>
+                <a:ea typeface="Arial"/>
+                <a:cs typeface="Arial"/>
+              </a:defRPr>
+            </a:pPr>
+            <a:r>
+              <a:rPr sz="900">
+                <a:solidFill>
+                  <a:srgbClr val="FFFFFF"/>
+                </a:solidFill>
+                <a:latin typeface="Arial"/>
+                <a:ea typeface="Arial"/>
+                <a:cs typeface="Arial"/>
+              </a:rPr>
+              <a:t>WEST VIRGINIA UNIVERSITY</a:t>
             </a:r>
           </a:p>
         </p:txBody>
@@ -35087,30 +35762,6 @@
       </p:pic>
       <p:sp>
         <p:nvSpPr>
-          <p:cNvPr id="361" name="DSPIRA 1"/>
-          <p:cNvSpPr>
-            <a:spLocks noGrp="1"/>
-          </p:cNvSpPr>
-          <p:nvPr/>
-        </p:nvSpPr>
-        <p:spPr>
-          <a:xfrm>
-            <a:off x="0" y="0"/>
-            <a:ext cx="9144000" cy="342900"/>
-          </a:xfrm>
-          <a:prstGeom prst="rect">
-            <a:avLst/>
-          </a:prstGeom>
-          <a:solidFill>
-            <a:srgbClr val="FFFFFF"/>
-          </a:solidFill>
-          <a:ln w="0">
-            <a:noFill/>
-          </a:ln>
-        </p:spPr>
-      </p:sp>
-      <p:sp>
-        <p:nvSpPr>
           <p:cNvPr id="362" name="DSPIRA 2"/>
           <p:cNvSpPr>
             <a:spLocks noGrp="1"/>
@@ -35132,57 +35783,6 @@
             <a:noFill/>
           </a:ln>
         </p:spPr>
-      </p:sp>
-      <p:sp>
-        <p:nvSpPr>
-          <p:cNvPr id="363" name="DSPIRA 3"/>
-          <p:cNvSpPr>
-            <a:spLocks noGrp="1"/>
-          </p:cNvSpPr>
-          <p:nvPr/>
-        </p:nvSpPr>
-        <p:spPr>
-          <a:xfrm>
-            <a:off x="228600" y="76200"/>
-            <a:ext cx="4762500" cy="228600"/>
-          </a:xfrm>
-          <a:prstGeom prst="rect">
-            <a:avLst/>
-          </a:prstGeom>
-          <a:noFill/>
-          <a:ln w="0">
-            <a:noFill/>
-          </a:ln>
-        </p:spPr>
-        <p:txBody>
-          <a:bodyPr>
-            <a:noAutofit/>
-          </a:bodyPr>
-          <a:lstStyle/>
-          <a:p>
-            <a:pPr>
-              <a:defRPr sz="1200" b="1">
-                <a:solidFill>
-                  <a:srgbClr val="002855"/>
-                </a:solidFill>
-                <a:latin typeface="Arial"/>
-                <a:ea typeface="Arial"/>
-                <a:cs typeface="Arial"/>
-              </a:defRPr>
-            </a:pPr>
-            <a:r>
-              <a:rPr sz="1200" b="1">
-                <a:solidFill>
-                  <a:srgbClr val="002855"/>
-                </a:solidFill>
-                <a:latin typeface="Arial"/>
-                <a:ea typeface="Arial"/>
-                <a:cs typeface="Arial"/>
-              </a:rPr>
-              <a:t>WVU DSPIRA</a:t>
-            </a:r>
-          </a:p>
-        </p:txBody>
       </p:sp>
       <p:sp>
         <p:nvSpPr>
@@ -35282,6 +35882,156 @@
                 <a:cs typeface="Arial"/>
               </a:rPr>
               <a:t>16 of 20</a:t>
+            </a:r>
+          </a:p>
+        </p:txBody>
+      </p:sp>
+      <p:sp>
+        <p:nvSpPr>
+          <p:cNvPr id="366" name="WVU DSPIRA navy band"/>
+          <p:cNvSpPr>
+            <a:spLocks noGrp="1"/>
+          </p:cNvSpPr>
+          <p:nvPr/>
+        </p:nvSpPr>
+        <p:spPr>
+          <a:xfrm>
+            <a:off x="0" y="0"/>
+            <a:ext cx="9144000" cy="323850"/>
+          </a:xfrm>
+          <a:prstGeom prst="rect">
+            <a:avLst/>
+          </a:prstGeom>
+          <a:solidFill>
+            <a:srgbClr val="002855"/>
+          </a:solidFill>
+          <a:ln w="0">
+            <a:noFill/>
+          </a:ln>
+        </p:spPr>
+      </p:sp>
+      <p:sp>
+        <p:nvSpPr>
+          <p:cNvPr id="367" name="WVU DSPIRA gold rule"/>
+          <p:cNvSpPr>
+            <a:spLocks noGrp="1"/>
+          </p:cNvSpPr>
+          <p:nvPr/>
+        </p:nvSpPr>
+        <p:spPr>
+          <a:xfrm>
+            <a:off x="0" y="323850"/>
+            <a:ext cx="9144000" cy="19050"/>
+          </a:xfrm>
+          <a:prstGeom prst="rect">
+            <a:avLst/>
+          </a:prstGeom>
+          <a:solidFill>
+            <a:srgbClr val="EEAA00"/>
+          </a:solidFill>
+          <a:ln w="0">
+            <a:noFill/>
+          </a:ln>
+        </p:spPr>
+      </p:sp>
+      <p:sp>
+        <p:nvSpPr>
+          <p:cNvPr id="368" name="WVU DSPIRA name"/>
+          <p:cNvSpPr>
+            <a:spLocks noGrp="1"/>
+          </p:cNvSpPr>
+          <p:nvPr/>
+        </p:nvSpPr>
+        <p:spPr>
+          <a:xfrm>
+            <a:off x="228600" y="19050"/>
+            <a:ext cx="2857500" cy="257175"/>
+          </a:xfrm>
+          <a:prstGeom prst="rect">
+            <a:avLst/>
+          </a:prstGeom>
+          <a:noFill/>
+          <a:ln w="0">
+            <a:noFill/>
+          </a:ln>
+        </p:spPr>
+        <p:txBody>
+          <a:bodyPr>
+            <a:noAutofit/>
+          </a:bodyPr>
+          <a:lstStyle/>
+          <a:p>
+            <a:pPr>
+              <a:defRPr sz="1600" b="1">
+                <a:solidFill>
+                  <a:srgbClr val="FFFFFF"/>
+                </a:solidFill>
+                <a:latin typeface="Arial"/>
+                <a:ea typeface="Arial"/>
+                <a:cs typeface="Arial"/>
+              </a:defRPr>
+            </a:pPr>
+            <a:r>
+              <a:rPr sz="1600" b="1">
+                <a:solidFill>
+                  <a:srgbClr val="FFFFFF"/>
+                </a:solidFill>
+                <a:latin typeface="Arial"/>
+                <a:ea typeface="Arial"/>
+                <a:cs typeface="Arial"/>
+              </a:rPr>
+              <a:t>WVU DSPIRA</a:t>
+            </a:r>
+          </a:p>
+        </p:txBody>
+      </p:sp>
+      <p:sp>
+        <p:nvSpPr>
+          <p:cNvPr id="369" name="WVU DSPIRA university"/>
+          <p:cNvSpPr>
+            <a:spLocks noGrp="1"/>
+          </p:cNvSpPr>
+          <p:nvPr/>
+        </p:nvSpPr>
+        <p:spPr>
+          <a:xfrm>
+            <a:off x="6286500" y="114300"/>
+            <a:ext cx="2628900" cy="171450"/>
+          </a:xfrm>
+          <a:prstGeom prst="rect">
+            <a:avLst/>
+          </a:prstGeom>
+          <a:noFill/>
+          <a:ln w="0">
+            <a:noFill/>
+          </a:ln>
+        </p:spPr>
+        <p:txBody>
+          <a:bodyPr>
+            <a:noAutofit/>
+          </a:bodyPr>
+          <a:lstStyle/>
+          <a:p>
+            <a:pPr algn="r">
+              <a:defRPr sz="900">
+                <a:solidFill>
+                  <a:srgbClr val="FFFFFF"/>
+                </a:solidFill>
+                <a:latin typeface="Arial"/>
+                <a:ea typeface="Arial"/>
+                <a:cs typeface="Arial"/>
+              </a:defRPr>
+            </a:pPr>
+            <a:r>
+              <a:rPr sz="900">
+                <a:solidFill>
+                  <a:srgbClr val="FFFFFF"/>
+                </a:solidFill>
+                <a:latin typeface="Arial"/>
+                <a:ea typeface="Arial"/>
+                <a:cs typeface="Arial"/>
+              </a:rPr>
+              <a:t>WEST VIRGINIA UNIVERSITY</a:t>
             </a:r>
           </a:p>
         </p:txBody>
@@ -35608,30 +36358,6 @@
       </p:pic>
       <p:sp>
         <p:nvSpPr>
-          <p:cNvPr id="368" name="DSPIRA 1"/>
-          <p:cNvSpPr>
-            <a:spLocks noGrp="1"/>
-          </p:cNvSpPr>
-          <p:nvPr/>
-        </p:nvSpPr>
-        <p:spPr>
-          <a:xfrm>
-            <a:off x="0" y="0"/>
-            <a:ext cx="9144000" cy="342900"/>
-          </a:xfrm>
-          <a:prstGeom prst="rect">
-            <a:avLst/>
-          </a:prstGeom>
-          <a:solidFill>
-            <a:srgbClr val="FFFFFF"/>
-          </a:solidFill>
-          <a:ln w="0">
-            <a:noFill/>
-          </a:ln>
-        </p:spPr>
-      </p:sp>
-      <p:sp>
-        <p:nvSpPr>
           <p:cNvPr id="369" name="DSPIRA 2"/>
           <p:cNvSpPr>
             <a:spLocks noGrp="1"/>
@@ -35653,57 +36379,6 @@
             <a:noFill/>
           </a:ln>
         </p:spPr>
-      </p:sp>
-      <p:sp>
-        <p:nvSpPr>
-          <p:cNvPr id="370" name="DSPIRA 3"/>
-          <p:cNvSpPr>
-            <a:spLocks noGrp="1"/>
-          </p:cNvSpPr>
-          <p:nvPr/>
-        </p:nvSpPr>
-        <p:spPr>
-          <a:xfrm>
-            <a:off x="228600" y="76200"/>
-            <a:ext cx="4762500" cy="228600"/>
-          </a:xfrm>
-          <a:prstGeom prst="rect">
-            <a:avLst/>
-          </a:prstGeom>
-          <a:noFill/>
-          <a:ln w="0">
-            <a:noFill/>
-          </a:ln>
-        </p:spPr>
-        <p:txBody>
-          <a:bodyPr>
-            <a:noAutofit/>
-          </a:bodyPr>
-          <a:lstStyle/>
-          <a:p>
-            <a:pPr>
-              <a:defRPr sz="1200" b="1">
-                <a:solidFill>
-                  <a:srgbClr val="002855"/>
-                </a:solidFill>
-                <a:latin typeface="Arial"/>
-                <a:ea typeface="Arial"/>
-                <a:cs typeface="Arial"/>
-              </a:defRPr>
-            </a:pPr>
-            <a:r>
-              <a:rPr sz="1200" b="1">
-                <a:solidFill>
-                  <a:srgbClr val="002855"/>
-                </a:solidFill>
-                <a:latin typeface="Arial"/>
-                <a:ea typeface="Arial"/>
-                <a:cs typeface="Arial"/>
-              </a:rPr>
-              <a:t>WVU DSPIRA</a:t>
-            </a:r>
-          </a:p>
-        </p:txBody>
       </p:sp>
       <p:sp>
         <p:nvSpPr>
@@ -35803,6 +36478,156 @@
                 <a:cs typeface="Arial"/>
               </a:rPr>
               <a:t>17 of 20</a:t>
+            </a:r>
+          </a:p>
+        </p:txBody>
+      </p:sp>
+      <p:sp>
+        <p:nvSpPr>
+          <p:cNvPr id="373" name="WVU DSPIRA navy band"/>
+          <p:cNvSpPr>
+            <a:spLocks noGrp="1"/>
+          </p:cNvSpPr>
+          <p:nvPr/>
+        </p:nvSpPr>
+        <p:spPr>
+          <a:xfrm>
+            <a:off x="0" y="0"/>
+            <a:ext cx="9144000" cy="323850"/>
+          </a:xfrm>
+          <a:prstGeom prst="rect">
+            <a:avLst/>
+          </a:prstGeom>
+          <a:solidFill>
+            <a:srgbClr val="002855"/>
+          </a:solidFill>
+          <a:ln w="0">
+            <a:noFill/>
+          </a:ln>
+        </p:spPr>
+      </p:sp>
+      <p:sp>
+        <p:nvSpPr>
+          <p:cNvPr id="374" name="WVU DSPIRA gold rule"/>
+          <p:cNvSpPr>
+            <a:spLocks noGrp="1"/>
+          </p:cNvSpPr>
+          <p:nvPr/>
+        </p:nvSpPr>
+        <p:spPr>
+          <a:xfrm>
+            <a:off x="0" y="323850"/>
+            <a:ext cx="9144000" cy="19050"/>
+          </a:xfrm>
+          <a:prstGeom prst="rect">
+            <a:avLst/>
+          </a:prstGeom>
+          <a:solidFill>
+            <a:srgbClr val="EEAA00"/>
+          </a:solidFill>
+          <a:ln w="0">
+            <a:noFill/>
+          </a:ln>
+        </p:spPr>
+      </p:sp>
+      <p:sp>
+        <p:nvSpPr>
+          <p:cNvPr id="375" name="WVU DSPIRA name"/>
+          <p:cNvSpPr>
+            <a:spLocks noGrp="1"/>
+          </p:cNvSpPr>
+          <p:nvPr/>
+        </p:nvSpPr>
+        <p:spPr>
+          <a:xfrm>
+            <a:off x="228600" y="19050"/>
+            <a:ext cx="2857500" cy="257175"/>
+          </a:xfrm>
+          <a:prstGeom prst="rect">
+            <a:avLst/>
+          </a:prstGeom>
+          <a:noFill/>
+          <a:ln w="0">
+            <a:noFill/>
+          </a:ln>
+        </p:spPr>
+        <p:txBody>
+          <a:bodyPr>
+            <a:noAutofit/>
+          </a:bodyPr>
+          <a:lstStyle/>
+          <a:p>
+            <a:pPr>
+              <a:defRPr sz="1600" b="1">
+                <a:solidFill>
+                  <a:srgbClr val="FFFFFF"/>
+                </a:solidFill>
+                <a:latin typeface="Arial"/>
+                <a:ea typeface="Arial"/>
+                <a:cs typeface="Arial"/>
+              </a:defRPr>
+            </a:pPr>
+            <a:r>
+              <a:rPr sz="1600" b="1">
+                <a:solidFill>
+                  <a:srgbClr val="FFFFFF"/>
+                </a:solidFill>
+                <a:latin typeface="Arial"/>
+                <a:ea typeface="Arial"/>
+                <a:cs typeface="Arial"/>
+              </a:rPr>
+              <a:t>WVU DSPIRA</a:t>
+            </a:r>
+          </a:p>
+        </p:txBody>
+      </p:sp>
+      <p:sp>
+        <p:nvSpPr>
+          <p:cNvPr id="376" name="WVU DSPIRA university"/>
+          <p:cNvSpPr>
+            <a:spLocks noGrp="1"/>
+          </p:cNvSpPr>
+          <p:nvPr/>
+        </p:nvSpPr>
+        <p:spPr>
+          <a:xfrm>
+            <a:off x="6286500" y="114300"/>
+            <a:ext cx="2628900" cy="171450"/>
+          </a:xfrm>
+          <a:prstGeom prst="rect">
+            <a:avLst/>
+          </a:prstGeom>
+          <a:noFill/>
+          <a:ln w="0">
+            <a:noFill/>
+          </a:ln>
+        </p:spPr>
+        <p:txBody>
+          <a:bodyPr>
+            <a:noAutofit/>
+          </a:bodyPr>
+          <a:lstStyle/>
+          <a:p>
+            <a:pPr algn="r">
+              <a:defRPr sz="900">
+                <a:solidFill>
+                  <a:srgbClr val="FFFFFF"/>
+                </a:solidFill>
+                <a:latin typeface="Arial"/>
+                <a:ea typeface="Arial"/>
+                <a:cs typeface="Arial"/>
+              </a:defRPr>
+            </a:pPr>
+            <a:r>
+              <a:rPr sz="900">
+                <a:solidFill>
+                  <a:srgbClr val="FFFFFF"/>
+                </a:solidFill>
+                <a:latin typeface="Arial"/>
+                <a:ea typeface="Arial"/>
+                <a:cs typeface="Arial"/>
+              </a:rPr>
+              <a:t>WEST VIRGINIA UNIVERSITY</a:t>
             </a:r>
           </a:p>
         </p:txBody>
@@ -35998,30 +36823,6 @@
       </p:pic>
       <p:sp>
         <p:nvSpPr>
-          <p:cNvPr id="245" name="DSPIRA 1"/>
-          <p:cNvSpPr>
-            <a:spLocks noGrp="1"/>
-          </p:cNvSpPr>
-          <p:nvPr/>
-        </p:nvSpPr>
-        <p:spPr>
-          <a:xfrm>
-            <a:off x="0" y="0"/>
-            <a:ext cx="9144000" cy="342900"/>
-          </a:xfrm>
-          <a:prstGeom prst="rect">
-            <a:avLst/>
-          </a:prstGeom>
-          <a:solidFill>
-            <a:srgbClr val="FFFFFF"/>
-          </a:solidFill>
-          <a:ln w="0">
-            <a:noFill/>
-          </a:ln>
-        </p:spPr>
-      </p:sp>
-      <p:sp>
-        <p:nvSpPr>
           <p:cNvPr id="246" name="DSPIRA 2"/>
           <p:cNvSpPr>
             <a:spLocks noGrp="1"/>
@@ -36043,57 +36844,6 @@
             <a:noFill/>
           </a:ln>
         </p:spPr>
-      </p:sp>
-      <p:sp>
-        <p:nvSpPr>
-          <p:cNvPr id="247" name="DSPIRA 3"/>
-          <p:cNvSpPr>
-            <a:spLocks noGrp="1"/>
-          </p:cNvSpPr>
-          <p:nvPr/>
-        </p:nvSpPr>
-        <p:spPr>
-          <a:xfrm>
-            <a:off x="228600" y="76200"/>
-            <a:ext cx="4762500" cy="228600"/>
-          </a:xfrm>
-          <a:prstGeom prst="rect">
-            <a:avLst/>
-          </a:prstGeom>
-          <a:noFill/>
-          <a:ln w="0">
-            <a:noFill/>
-          </a:ln>
-        </p:spPr>
-        <p:txBody>
-          <a:bodyPr>
-            <a:noAutofit/>
-          </a:bodyPr>
-          <a:lstStyle/>
-          <a:p>
-            <a:pPr>
-              <a:defRPr sz="1200" b="1">
-                <a:solidFill>
-                  <a:srgbClr val="002855"/>
-                </a:solidFill>
-                <a:latin typeface="Arial"/>
-                <a:ea typeface="Arial"/>
-                <a:cs typeface="Arial"/>
-              </a:defRPr>
-            </a:pPr>
-            <a:r>
-              <a:rPr sz="1200" b="1">
-                <a:solidFill>
-                  <a:srgbClr val="002855"/>
-                </a:solidFill>
-                <a:latin typeface="Arial"/>
-                <a:ea typeface="Arial"/>
-                <a:cs typeface="Arial"/>
-              </a:rPr>
-              <a:t>WVU DSPIRA</a:t>
-            </a:r>
-          </a:p>
-        </p:txBody>
       </p:sp>
       <p:sp>
         <p:nvSpPr>
@@ -36193,6 +36943,156 @@
                 <a:cs typeface="Arial"/>
               </a:rPr>
               <a:t>2 of 20</a:t>
+            </a:r>
+          </a:p>
+        </p:txBody>
+      </p:sp>
+      <p:sp>
+        <p:nvSpPr>
+          <p:cNvPr id="250" name="WVU DSPIRA navy band"/>
+          <p:cNvSpPr>
+            <a:spLocks noGrp="1"/>
+          </p:cNvSpPr>
+          <p:nvPr/>
+        </p:nvSpPr>
+        <p:spPr>
+          <a:xfrm>
+            <a:off x="0" y="0"/>
+            <a:ext cx="9144000" cy="323850"/>
+          </a:xfrm>
+          <a:prstGeom prst="rect">
+            <a:avLst/>
+          </a:prstGeom>
+          <a:solidFill>
+            <a:srgbClr val="002855"/>
+          </a:solidFill>
+          <a:ln w="0">
+            <a:noFill/>
+          </a:ln>
+        </p:spPr>
+      </p:sp>
+      <p:sp>
+        <p:nvSpPr>
+          <p:cNvPr id="251" name="WVU DSPIRA gold rule"/>
+          <p:cNvSpPr>
+            <a:spLocks noGrp="1"/>
+          </p:cNvSpPr>
+          <p:nvPr/>
+        </p:nvSpPr>
+        <p:spPr>
+          <a:xfrm>
+            <a:off x="0" y="323850"/>
+            <a:ext cx="9144000" cy="19050"/>
+          </a:xfrm>
+          <a:prstGeom prst="rect">
+            <a:avLst/>
+          </a:prstGeom>
+          <a:solidFill>
+            <a:srgbClr val="EEAA00"/>
+          </a:solidFill>
+          <a:ln w="0">
+            <a:noFill/>
+          </a:ln>
+        </p:spPr>
+      </p:sp>
+      <p:sp>
+        <p:nvSpPr>
+          <p:cNvPr id="252" name="WVU DSPIRA name"/>
+          <p:cNvSpPr>
+            <a:spLocks noGrp="1"/>
+          </p:cNvSpPr>
+          <p:nvPr/>
+        </p:nvSpPr>
+        <p:spPr>
+          <a:xfrm>
+            <a:off x="228600" y="19050"/>
+            <a:ext cx="2857500" cy="257175"/>
+          </a:xfrm>
+          <a:prstGeom prst="rect">
+            <a:avLst/>
+          </a:prstGeom>
+          <a:noFill/>
+          <a:ln w="0">
+            <a:noFill/>
+          </a:ln>
+        </p:spPr>
+        <p:txBody>
+          <a:bodyPr>
+            <a:noAutofit/>
+          </a:bodyPr>
+          <a:lstStyle/>
+          <a:p>
+            <a:pPr>
+              <a:defRPr sz="1600" b="1">
+                <a:solidFill>
+                  <a:srgbClr val="FFFFFF"/>
+                </a:solidFill>
+                <a:latin typeface="Arial"/>
+                <a:ea typeface="Arial"/>
+                <a:cs typeface="Arial"/>
+              </a:defRPr>
+            </a:pPr>
+            <a:r>
+              <a:rPr sz="1600" b="1">
+                <a:solidFill>
+                  <a:srgbClr val="FFFFFF"/>
+                </a:solidFill>
+                <a:latin typeface="Arial"/>
+                <a:ea typeface="Arial"/>
+                <a:cs typeface="Arial"/>
+              </a:rPr>
+              <a:t>WVU DSPIRA</a:t>
+            </a:r>
+          </a:p>
+        </p:txBody>
+      </p:sp>
+      <p:sp>
+        <p:nvSpPr>
+          <p:cNvPr id="253" name="WVU DSPIRA university"/>
+          <p:cNvSpPr>
+            <a:spLocks noGrp="1"/>
+          </p:cNvSpPr>
+          <p:nvPr/>
+        </p:nvSpPr>
+        <p:spPr>
+          <a:xfrm>
+            <a:off x="6286500" y="114300"/>
+            <a:ext cx="2628900" cy="171450"/>
+          </a:xfrm>
+          <a:prstGeom prst="rect">
+            <a:avLst/>
+          </a:prstGeom>
+          <a:noFill/>
+          <a:ln w="0">
+            <a:noFill/>
+          </a:ln>
+        </p:spPr>
+        <p:txBody>
+          <a:bodyPr>
+            <a:noAutofit/>
+          </a:bodyPr>
+          <a:lstStyle/>
+          <a:p>
+            <a:pPr algn="r">
+              <a:defRPr sz="900">
+                <a:solidFill>
+                  <a:srgbClr val="FFFFFF"/>
+                </a:solidFill>
+                <a:latin typeface="Arial"/>
+                <a:ea typeface="Arial"/>
+                <a:cs typeface="Arial"/>
+              </a:defRPr>
+            </a:pPr>
+            <a:r>
+              <a:rPr sz="900">
+                <a:solidFill>
+                  <a:srgbClr val="FFFFFF"/>
+                </a:solidFill>
+                <a:latin typeface="Arial"/>
+                <a:ea typeface="Arial"/>
+                <a:cs typeface="Arial"/>
+              </a:rPr>
+              <a:t>WEST VIRGINIA UNIVERSITY</a:t>
             </a:r>
           </a:p>
         </p:txBody>
@@ -36484,30 +37384,6 @@
       </p:pic>
       <p:sp>
         <p:nvSpPr>
-          <p:cNvPr id="375" name="DSPIRA 1"/>
-          <p:cNvSpPr>
-            <a:spLocks noGrp="1"/>
-          </p:cNvSpPr>
-          <p:nvPr/>
-        </p:nvSpPr>
-        <p:spPr>
-          <a:xfrm>
-            <a:off x="0" y="0"/>
-            <a:ext cx="9144000" cy="342900"/>
-          </a:xfrm>
-          <a:prstGeom prst="rect">
-            <a:avLst/>
-          </a:prstGeom>
-          <a:solidFill>
-            <a:srgbClr val="FFFFFF"/>
-          </a:solidFill>
-          <a:ln w="0">
-            <a:noFill/>
-          </a:ln>
-        </p:spPr>
-      </p:sp>
-      <p:sp>
-        <p:nvSpPr>
           <p:cNvPr id="376" name="DSPIRA 2"/>
           <p:cNvSpPr>
             <a:spLocks noGrp="1"/>
@@ -36529,57 +37405,6 @@
             <a:noFill/>
           </a:ln>
         </p:spPr>
-      </p:sp>
-      <p:sp>
-        <p:nvSpPr>
-          <p:cNvPr id="377" name="DSPIRA 3"/>
-          <p:cNvSpPr>
-            <a:spLocks noGrp="1"/>
-          </p:cNvSpPr>
-          <p:nvPr/>
-        </p:nvSpPr>
-        <p:spPr>
-          <a:xfrm>
-            <a:off x="228600" y="76200"/>
-            <a:ext cx="4762500" cy="228600"/>
-          </a:xfrm>
-          <a:prstGeom prst="rect">
-            <a:avLst/>
-          </a:prstGeom>
-          <a:noFill/>
-          <a:ln w="0">
-            <a:noFill/>
-          </a:ln>
-        </p:spPr>
-        <p:txBody>
-          <a:bodyPr>
-            <a:noAutofit/>
-          </a:bodyPr>
-          <a:lstStyle/>
-          <a:p>
-            <a:pPr>
-              <a:defRPr sz="1200" b="1">
-                <a:solidFill>
-                  <a:srgbClr val="002855"/>
-                </a:solidFill>
-                <a:latin typeface="Arial"/>
-                <a:ea typeface="Arial"/>
-                <a:cs typeface="Arial"/>
-              </a:defRPr>
-            </a:pPr>
-            <a:r>
-              <a:rPr sz="1200" b="1">
-                <a:solidFill>
-                  <a:srgbClr val="002855"/>
-                </a:solidFill>
-                <a:latin typeface="Arial"/>
-                <a:ea typeface="Arial"/>
-                <a:cs typeface="Arial"/>
-              </a:rPr>
-              <a:t>WVU DSPIRA</a:t>
-            </a:r>
-          </a:p>
-        </p:txBody>
       </p:sp>
       <p:sp>
         <p:nvSpPr>
@@ -36679,6 +37504,156 @@
                 <a:cs typeface="Arial"/>
               </a:rPr>
               <a:t>18 of 20</a:t>
+            </a:r>
+          </a:p>
+        </p:txBody>
+      </p:sp>
+      <p:sp>
+        <p:nvSpPr>
+          <p:cNvPr id="380" name="WVU DSPIRA navy band"/>
+          <p:cNvSpPr>
+            <a:spLocks noGrp="1"/>
+          </p:cNvSpPr>
+          <p:nvPr/>
+        </p:nvSpPr>
+        <p:spPr>
+          <a:xfrm>
+            <a:off x="0" y="0"/>
+            <a:ext cx="9144000" cy="323850"/>
+          </a:xfrm>
+          <a:prstGeom prst="rect">
+            <a:avLst/>
+          </a:prstGeom>
+          <a:solidFill>
+            <a:srgbClr val="002855"/>
+          </a:solidFill>
+          <a:ln w="0">
+            <a:noFill/>
+          </a:ln>
+        </p:spPr>
+      </p:sp>
+      <p:sp>
+        <p:nvSpPr>
+          <p:cNvPr id="381" name="WVU DSPIRA gold rule"/>
+          <p:cNvSpPr>
+            <a:spLocks noGrp="1"/>
+          </p:cNvSpPr>
+          <p:nvPr/>
+        </p:nvSpPr>
+        <p:spPr>
+          <a:xfrm>
+            <a:off x="0" y="323850"/>
+            <a:ext cx="9144000" cy="19050"/>
+          </a:xfrm>
+          <a:prstGeom prst="rect">
+            <a:avLst/>
+          </a:prstGeom>
+          <a:solidFill>
+            <a:srgbClr val="EEAA00"/>
+          </a:solidFill>
+          <a:ln w="0">
+            <a:noFill/>
+          </a:ln>
+        </p:spPr>
+      </p:sp>
+      <p:sp>
+        <p:nvSpPr>
+          <p:cNvPr id="382" name="WVU DSPIRA name"/>
+          <p:cNvSpPr>
+            <a:spLocks noGrp="1"/>
+          </p:cNvSpPr>
+          <p:nvPr/>
+        </p:nvSpPr>
+        <p:spPr>
+          <a:xfrm>
+            <a:off x="228600" y="19050"/>
+            <a:ext cx="2857500" cy="257175"/>
+          </a:xfrm>
+          <a:prstGeom prst="rect">
+            <a:avLst/>
+          </a:prstGeom>
+          <a:noFill/>
+          <a:ln w="0">
+            <a:noFill/>
+          </a:ln>
+        </p:spPr>
+        <p:txBody>
+          <a:bodyPr>
+            <a:noAutofit/>
+          </a:bodyPr>
+          <a:lstStyle/>
+          <a:p>
+            <a:pPr>
+              <a:defRPr sz="1600" b="1">
+                <a:solidFill>
+                  <a:srgbClr val="FFFFFF"/>
+                </a:solidFill>
+                <a:latin typeface="Arial"/>
+                <a:ea typeface="Arial"/>
+                <a:cs typeface="Arial"/>
+              </a:defRPr>
+            </a:pPr>
+            <a:r>
+              <a:rPr sz="1600" b="1">
+                <a:solidFill>
+                  <a:srgbClr val="FFFFFF"/>
+                </a:solidFill>
+                <a:latin typeface="Arial"/>
+                <a:ea typeface="Arial"/>
+                <a:cs typeface="Arial"/>
+              </a:rPr>
+              <a:t>WVU DSPIRA</a:t>
+            </a:r>
+          </a:p>
+        </p:txBody>
+      </p:sp>
+      <p:sp>
+        <p:nvSpPr>
+          <p:cNvPr id="383" name="WVU DSPIRA university"/>
+          <p:cNvSpPr>
+            <a:spLocks noGrp="1"/>
+          </p:cNvSpPr>
+          <p:nvPr/>
+        </p:nvSpPr>
+        <p:spPr>
+          <a:xfrm>
+            <a:off x="6286500" y="114300"/>
+            <a:ext cx="2628900" cy="171450"/>
+          </a:xfrm>
+          <a:prstGeom prst="rect">
+            <a:avLst/>
+          </a:prstGeom>
+          <a:noFill/>
+          <a:ln w="0">
+            <a:noFill/>
+          </a:ln>
+        </p:spPr>
+        <p:txBody>
+          <a:bodyPr>
+            <a:noAutofit/>
+          </a:bodyPr>
+          <a:lstStyle/>
+          <a:p>
+            <a:pPr algn="r">
+              <a:defRPr sz="900">
+                <a:solidFill>
+                  <a:srgbClr val="FFFFFF"/>
+                </a:solidFill>
+                <a:latin typeface="Arial"/>
+                <a:ea typeface="Arial"/>
+                <a:cs typeface="Arial"/>
+              </a:defRPr>
+            </a:pPr>
+            <a:r>
+              <a:rPr sz="900">
+                <a:solidFill>
+                  <a:srgbClr val="FFFFFF"/>
+                </a:solidFill>
+                <a:latin typeface="Arial"/>
+                <a:ea typeface="Arial"/>
+                <a:cs typeface="Arial"/>
+              </a:rPr>
+              <a:t>WEST VIRGINIA UNIVERSITY</a:t>
             </a:r>
           </a:p>
         </p:txBody>
@@ -36984,30 +37959,6 @@
       </p:pic>
       <p:sp>
         <p:nvSpPr>
-          <p:cNvPr id="382" name="DSPIRA 1"/>
-          <p:cNvSpPr>
-            <a:spLocks noGrp="1"/>
-          </p:cNvSpPr>
-          <p:nvPr/>
-        </p:nvSpPr>
-        <p:spPr>
-          <a:xfrm>
-            <a:off x="0" y="0"/>
-            <a:ext cx="9144000" cy="342900"/>
-          </a:xfrm>
-          <a:prstGeom prst="rect">
-            <a:avLst/>
-          </a:prstGeom>
-          <a:solidFill>
-            <a:srgbClr val="FFFFFF"/>
-          </a:solidFill>
-          <a:ln w="0">
-            <a:noFill/>
-          </a:ln>
-        </p:spPr>
-      </p:sp>
-      <p:sp>
-        <p:nvSpPr>
           <p:cNvPr id="383" name="DSPIRA 2"/>
           <p:cNvSpPr>
             <a:spLocks noGrp="1"/>
@@ -37029,57 +37980,6 @@
             <a:noFill/>
           </a:ln>
         </p:spPr>
-      </p:sp>
-      <p:sp>
-        <p:nvSpPr>
-          <p:cNvPr id="384" name="DSPIRA 3"/>
-          <p:cNvSpPr>
-            <a:spLocks noGrp="1"/>
-          </p:cNvSpPr>
-          <p:nvPr/>
-        </p:nvSpPr>
-        <p:spPr>
-          <a:xfrm>
-            <a:off x="228600" y="76200"/>
-            <a:ext cx="4762500" cy="228600"/>
-          </a:xfrm>
-          <a:prstGeom prst="rect">
-            <a:avLst/>
-          </a:prstGeom>
-          <a:noFill/>
-          <a:ln w="0">
-            <a:noFill/>
-          </a:ln>
-        </p:spPr>
-        <p:txBody>
-          <a:bodyPr>
-            <a:noAutofit/>
-          </a:bodyPr>
-          <a:lstStyle/>
-          <a:p>
-            <a:pPr>
-              <a:defRPr sz="1200" b="1">
-                <a:solidFill>
-                  <a:srgbClr val="002855"/>
-                </a:solidFill>
-                <a:latin typeface="Arial"/>
-                <a:ea typeface="Arial"/>
-                <a:cs typeface="Arial"/>
-              </a:defRPr>
-            </a:pPr>
-            <a:r>
-              <a:rPr sz="1200" b="1">
-                <a:solidFill>
-                  <a:srgbClr val="002855"/>
-                </a:solidFill>
-                <a:latin typeface="Arial"/>
-                <a:ea typeface="Arial"/>
-                <a:cs typeface="Arial"/>
-              </a:rPr>
-              <a:t>WVU DSPIRA</a:t>
-            </a:r>
-          </a:p>
-        </p:txBody>
       </p:sp>
       <p:sp>
         <p:nvSpPr>
@@ -37179,6 +38079,156 @@
                 <a:cs typeface="Arial"/>
               </a:rPr>
               <a:t>19 of 20</a:t>
+            </a:r>
+          </a:p>
+        </p:txBody>
+      </p:sp>
+      <p:sp>
+        <p:nvSpPr>
+          <p:cNvPr id="387" name="WVU DSPIRA navy band"/>
+          <p:cNvSpPr>
+            <a:spLocks noGrp="1"/>
+          </p:cNvSpPr>
+          <p:nvPr/>
+        </p:nvSpPr>
+        <p:spPr>
+          <a:xfrm>
+            <a:off x="0" y="0"/>
+            <a:ext cx="9144000" cy="323850"/>
+          </a:xfrm>
+          <a:prstGeom prst="rect">
+            <a:avLst/>
+          </a:prstGeom>
+          <a:solidFill>
+            <a:srgbClr val="002855"/>
+          </a:solidFill>
+          <a:ln w="0">
+            <a:noFill/>
+          </a:ln>
+        </p:spPr>
+      </p:sp>
+      <p:sp>
+        <p:nvSpPr>
+          <p:cNvPr id="388" name="WVU DSPIRA gold rule"/>
+          <p:cNvSpPr>
+            <a:spLocks noGrp="1"/>
+          </p:cNvSpPr>
+          <p:nvPr/>
+        </p:nvSpPr>
+        <p:spPr>
+          <a:xfrm>
+            <a:off x="0" y="323850"/>
+            <a:ext cx="9144000" cy="19050"/>
+          </a:xfrm>
+          <a:prstGeom prst="rect">
+            <a:avLst/>
+          </a:prstGeom>
+          <a:solidFill>
+            <a:srgbClr val="EEAA00"/>
+          </a:solidFill>
+          <a:ln w="0">
+            <a:noFill/>
+          </a:ln>
+        </p:spPr>
+      </p:sp>
+      <p:sp>
+        <p:nvSpPr>
+          <p:cNvPr id="389" name="WVU DSPIRA name"/>
+          <p:cNvSpPr>
+            <a:spLocks noGrp="1"/>
+          </p:cNvSpPr>
+          <p:nvPr/>
+        </p:nvSpPr>
+        <p:spPr>
+          <a:xfrm>
+            <a:off x="228600" y="19050"/>
+            <a:ext cx="2857500" cy="257175"/>
+          </a:xfrm>
+          <a:prstGeom prst="rect">
+            <a:avLst/>
+          </a:prstGeom>
+          <a:noFill/>
+          <a:ln w="0">
+            <a:noFill/>
+          </a:ln>
+        </p:spPr>
+        <p:txBody>
+          <a:bodyPr>
+            <a:noAutofit/>
+          </a:bodyPr>
+          <a:lstStyle/>
+          <a:p>
+            <a:pPr>
+              <a:defRPr sz="1600" b="1">
+                <a:solidFill>
+                  <a:srgbClr val="FFFFFF"/>
+                </a:solidFill>
+                <a:latin typeface="Arial"/>
+                <a:ea typeface="Arial"/>
+                <a:cs typeface="Arial"/>
+              </a:defRPr>
+            </a:pPr>
+            <a:r>
+              <a:rPr sz="1600" b="1">
+                <a:solidFill>
+                  <a:srgbClr val="FFFFFF"/>
+                </a:solidFill>
+                <a:latin typeface="Arial"/>
+                <a:ea typeface="Arial"/>
+                <a:cs typeface="Arial"/>
+              </a:rPr>
+              <a:t>WVU DSPIRA</a:t>
+            </a:r>
+          </a:p>
+        </p:txBody>
+      </p:sp>
+      <p:sp>
+        <p:nvSpPr>
+          <p:cNvPr id="390" name="WVU DSPIRA university"/>
+          <p:cNvSpPr>
+            <a:spLocks noGrp="1"/>
+          </p:cNvSpPr>
+          <p:nvPr/>
+        </p:nvSpPr>
+        <p:spPr>
+          <a:xfrm>
+            <a:off x="6286500" y="114300"/>
+            <a:ext cx="2628900" cy="171450"/>
+          </a:xfrm>
+          <a:prstGeom prst="rect">
+            <a:avLst/>
+          </a:prstGeom>
+          <a:noFill/>
+          <a:ln w="0">
+            <a:noFill/>
+          </a:ln>
+        </p:spPr>
+        <p:txBody>
+          <a:bodyPr>
+            <a:noAutofit/>
+          </a:bodyPr>
+          <a:lstStyle/>
+          <a:p>
+            <a:pPr algn="r">
+              <a:defRPr sz="900">
+                <a:solidFill>
+                  <a:srgbClr val="FFFFFF"/>
+                </a:solidFill>
+                <a:latin typeface="Arial"/>
+                <a:ea typeface="Arial"/>
+                <a:cs typeface="Arial"/>
+              </a:defRPr>
+            </a:pPr>
+            <a:r>
+              <a:rPr sz="900">
+                <a:solidFill>
+                  <a:srgbClr val="FFFFFF"/>
+                </a:solidFill>
+                <a:latin typeface="Arial"/>
+                <a:ea typeface="Arial"/>
+                <a:cs typeface="Arial"/>
+              </a:rPr>
+              <a:t>WEST VIRGINIA UNIVERSITY</a:t>
             </a:r>
           </a:p>
         </p:txBody>
@@ -37658,30 +38708,6 @@
       </p:sp>
       <p:sp>
         <p:nvSpPr>
-          <p:cNvPr id="388" name="DSPIRA 1"/>
-          <p:cNvSpPr>
-            <a:spLocks noGrp="1"/>
-          </p:cNvSpPr>
-          <p:nvPr/>
-        </p:nvSpPr>
-        <p:spPr>
-          <a:xfrm>
-            <a:off x="0" y="0"/>
-            <a:ext cx="9144000" cy="342900"/>
-          </a:xfrm>
-          <a:prstGeom prst="rect">
-            <a:avLst/>
-          </a:prstGeom>
-          <a:solidFill>
-            <a:srgbClr val="FFFFFF"/>
-          </a:solidFill>
-          <a:ln w="0">
-            <a:noFill/>
-          </a:ln>
-        </p:spPr>
-      </p:sp>
-      <p:sp>
-        <p:nvSpPr>
           <p:cNvPr id="389" name="DSPIRA 2"/>
           <p:cNvSpPr>
             <a:spLocks noGrp="1"/>
@@ -37703,57 +38729,6 @@
             <a:noFill/>
           </a:ln>
         </p:spPr>
-      </p:sp>
-      <p:sp>
-        <p:nvSpPr>
-          <p:cNvPr id="390" name="DSPIRA 3"/>
-          <p:cNvSpPr>
-            <a:spLocks noGrp="1"/>
-          </p:cNvSpPr>
-          <p:nvPr/>
-        </p:nvSpPr>
-        <p:spPr>
-          <a:xfrm>
-            <a:off x="228600" y="76200"/>
-            <a:ext cx="4762500" cy="228600"/>
-          </a:xfrm>
-          <a:prstGeom prst="rect">
-            <a:avLst/>
-          </a:prstGeom>
-          <a:noFill/>
-          <a:ln w="0">
-            <a:noFill/>
-          </a:ln>
-        </p:spPr>
-        <p:txBody>
-          <a:bodyPr>
-            <a:noAutofit/>
-          </a:bodyPr>
-          <a:lstStyle/>
-          <a:p>
-            <a:pPr>
-              <a:defRPr sz="1200" b="1">
-                <a:solidFill>
-                  <a:srgbClr val="002855"/>
-                </a:solidFill>
-                <a:latin typeface="Arial"/>
-                <a:ea typeface="Arial"/>
-                <a:cs typeface="Arial"/>
-              </a:defRPr>
-            </a:pPr>
-            <a:r>
-              <a:rPr sz="1200" b="1">
-                <a:solidFill>
-                  <a:srgbClr val="002855"/>
-                </a:solidFill>
-                <a:latin typeface="Arial"/>
-                <a:ea typeface="Arial"/>
-                <a:cs typeface="Arial"/>
-              </a:rPr>
-              <a:t>WVU DSPIRA</a:t>
-            </a:r>
-          </a:p>
-        </p:txBody>
       </p:sp>
       <p:sp>
         <p:nvSpPr>
@@ -37853,6 +38828,156 @@
                 <a:cs typeface="Arial"/>
               </a:rPr>
               <a:t>20 of 20</a:t>
+            </a:r>
+          </a:p>
+        </p:txBody>
+      </p:sp>
+      <p:sp>
+        <p:nvSpPr>
+          <p:cNvPr id="393" name="WVU DSPIRA navy band"/>
+          <p:cNvSpPr>
+            <a:spLocks noGrp="1"/>
+          </p:cNvSpPr>
+          <p:nvPr/>
+        </p:nvSpPr>
+        <p:spPr>
+          <a:xfrm>
+            <a:off x="0" y="0"/>
+            <a:ext cx="9144000" cy="323850"/>
+          </a:xfrm>
+          <a:prstGeom prst="rect">
+            <a:avLst/>
+          </a:prstGeom>
+          <a:solidFill>
+            <a:srgbClr val="002855"/>
+          </a:solidFill>
+          <a:ln w="0">
+            <a:noFill/>
+          </a:ln>
+        </p:spPr>
+      </p:sp>
+      <p:sp>
+        <p:nvSpPr>
+          <p:cNvPr id="394" name="WVU DSPIRA gold rule"/>
+          <p:cNvSpPr>
+            <a:spLocks noGrp="1"/>
+          </p:cNvSpPr>
+          <p:nvPr/>
+        </p:nvSpPr>
+        <p:spPr>
+          <a:xfrm>
+            <a:off x="0" y="323850"/>
+            <a:ext cx="9144000" cy="19050"/>
+          </a:xfrm>
+          <a:prstGeom prst="rect">
+            <a:avLst/>
+          </a:prstGeom>
+          <a:solidFill>
+            <a:srgbClr val="EEAA00"/>
+          </a:solidFill>
+          <a:ln w="0">
+            <a:noFill/>
+          </a:ln>
+        </p:spPr>
+      </p:sp>
+      <p:sp>
+        <p:nvSpPr>
+          <p:cNvPr id="395" name="WVU DSPIRA name"/>
+          <p:cNvSpPr>
+            <a:spLocks noGrp="1"/>
+          </p:cNvSpPr>
+          <p:nvPr/>
+        </p:nvSpPr>
+        <p:spPr>
+          <a:xfrm>
+            <a:off x="228600" y="19050"/>
+            <a:ext cx="2857500" cy="257175"/>
+          </a:xfrm>
+          <a:prstGeom prst="rect">
+            <a:avLst/>
+          </a:prstGeom>
+          <a:noFill/>
+          <a:ln w="0">
+            <a:noFill/>
+          </a:ln>
+        </p:spPr>
+        <p:txBody>
+          <a:bodyPr>
+            <a:noAutofit/>
+          </a:bodyPr>
+          <a:lstStyle/>
+          <a:p>
+            <a:pPr>
+              <a:defRPr sz="1600" b="1">
+                <a:solidFill>
+                  <a:srgbClr val="FFFFFF"/>
+                </a:solidFill>
+                <a:latin typeface="Arial"/>
+                <a:ea typeface="Arial"/>
+                <a:cs typeface="Arial"/>
+              </a:defRPr>
+            </a:pPr>
+            <a:r>
+              <a:rPr sz="1600" b="1">
+                <a:solidFill>
+                  <a:srgbClr val="FFFFFF"/>
+                </a:solidFill>
+                <a:latin typeface="Arial"/>
+                <a:ea typeface="Arial"/>
+                <a:cs typeface="Arial"/>
+              </a:rPr>
+              <a:t>WVU DSPIRA</a:t>
+            </a:r>
+          </a:p>
+        </p:txBody>
+      </p:sp>
+      <p:sp>
+        <p:nvSpPr>
+          <p:cNvPr id="396" name="WVU DSPIRA university"/>
+          <p:cNvSpPr>
+            <a:spLocks noGrp="1"/>
+          </p:cNvSpPr>
+          <p:nvPr/>
+        </p:nvSpPr>
+        <p:spPr>
+          <a:xfrm>
+            <a:off x="6286500" y="114300"/>
+            <a:ext cx="2628900" cy="171450"/>
+          </a:xfrm>
+          <a:prstGeom prst="rect">
+            <a:avLst/>
+          </a:prstGeom>
+          <a:noFill/>
+          <a:ln w="0">
+            <a:noFill/>
+          </a:ln>
+        </p:spPr>
+        <p:txBody>
+          <a:bodyPr>
+            <a:noAutofit/>
+          </a:bodyPr>
+          <a:lstStyle/>
+          <a:p>
+            <a:pPr algn="r">
+              <a:defRPr sz="900">
+                <a:solidFill>
+                  <a:srgbClr val="FFFFFF"/>
+                </a:solidFill>
+                <a:latin typeface="Arial"/>
+                <a:ea typeface="Arial"/>
+                <a:cs typeface="Arial"/>
+              </a:defRPr>
+            </a:pPr>
+            <a:r>
+              <a:rPr sz="900">
+                <a:solidFill>
+                  <a:srgbClr val="FFFFFF"/>
+                </a:solidFill>
+                <a:latin typeface="Arial"/>
+                <a:ea typeface="Arial"/>
+                <a:cs typeface="Arial"/>
+              </a:rPr>
+              <a:t>WEST VIRGINIA UNIVERSITY</a:t>
             </a:r>
           </a:p>
         </p:txBody>
@@ -37979,30 +39104,6 @@
       </p:pic>
       <p:sp>
         <p:nvSpPr>
-          <p:cNvPr id="395" name="DSPIRA 1"/>
-          <p:cNvSpPr>
-            <a:spLocks noGrp="1"/>
-          </p:cNvSpPr>
-          <p:nvPr/>
-        </p:nvSpPr>
-        <p:spPr>
-          <a:xfrm>
-            <a:off x="0" y="0"/>
-            <a:ext cx="9144000" cy="342900"/>
-          </a:xfrm>
-          <a:prstGeom prst="rect">
-            <a:avLst/>
-          </a:prstGeom>
-          <a:solidFill>
-            <a:srgbClr val="FFFFFF"/>
-          </a:solidFill>
-          <a:ln w="0">
-            <a:noFill/>
-          </a:ln>
-        </p:spPr>
-      </p:sp>
-      <p:sp>
-        <p:nvSpPr>
           <p:cNvPr id="396" name="DSPIRA 2"/>
           <p:cNvSpPr>
             <a:spLocks noGrp="1"/>
@@ -38024,57 +39125,6 @@
             <a:noFill/>
           </a:ln>
         </p:spPr>
-      </p:sp>
-      <p:sp>
-        <p:nvSpPr>
-          <p:cNvPr id="397" name="DSPIRA 3"/>
-          <p:cNvSpPr>
-            <a:spLocks noGrp="1"/>
-          </p:cNvSpPr>
-          <p:nvPr/>
-        </p:nvSpPr>
-        <p:spPr>
-          <a:xfrm>
-            <a:off x="228600" y="76200"/>
-            <a:ext cx="4762500" cy="228600"/>
-          </a:xfrm>
-          <a:prstGeom prst="rect">
-            <a:avLst/>
-          </a:prstGeom>
-          <a:noFill/>
-          <a:ln w="0">
-            <a:noFill/>
-          </a:ln>
-        </p:spPr>
-        <p:txBody>
-          <a:bodyPr>
-            <a:noAutofit/>
-          </a:bodyPr>
-          <a:lstStyle/>
-          <a:p>
-            <a:pPr>
-              <a:defRPr sz="1200" b="1">
-                <a:solidFill>
-                  <a:srgbClr val="002855"/>
-                </a:solidFill>
-                <a:latin typeface="Arial"/>
-                <a:ea typeface="Arial"/>
-                <a:cs typeface="Arial"/>
-              </a:defRPr>
-            </a:pPr>
-            <a:r>
-              <a:rPr sz="1200" b="1">
-                <a:solidFill>
-                  <a:srgbClr val="002855"/>
-                </a:solidFill>
-                <a:latin typeface="Arial"/>
-                <a:ea typeface="Arial"/>
-                <a:cs typeface="Arial"/>
-              </a:rPr>
-              <a:t>WVU DSPIRA</a:t>
-            </a:r>
-          </a:p>
-        </p:txBody>
       </p:sp>
       <p:sp>
         <p:nvSpPr>
@@ -38174,6 +39224,156 @@
                 <a:cs typeface="Arial"/>
               </a:rPr>
               <a:t>Supplemental</a:t>
+            </a:r>
+          </a:p>
+        </p:txBody>
+      </p:sp>
+      <p:sp>
+        <p:nvSpPr>
+          <p:cNvPr id="400" name="WVU DSPIRA navy band"/>
+          <p:cNvSpPr>
+            <a:spLocks noGrp="1"/>
+          </p:cNvSpPr>
+          <p:nvPr/>
+        </p:nvSpPr>
+        <p:spPr>
+          <a:xfrm>
+            <a:off x="0" y="0"/>
+            <a:ext cx="9144000" cy="323850"/>
+          </a:xfrm>
+          <a:prstGeom prst="rect">
+            <a:avLst/>
+          </a:prstGeom>
+          <a:solidFill>
+            <a:srgbClr val="002855"/>
+          </a:solidFill>
+          <a:ln w="0">
+            <a:noFill/>
+          </a:ln>
+        </p:spPr>
+      </p:sp>
+      <p:sp>
+        <p:nvSpPr>
+          <p:cNvPr id="401" name="WVU DSPIRA gold rule"/>
+          <p:cNvSpPr>
+            <a:spLocks noGrp="1"/>
+          </p:cNvSpPr>
+          <p:nvPr/>
+        </p:nvSpPr>
+        <p:spPr>
+          <a:xfrm>
+            <a:off x="0" y="323850"/>
+            <a:ext cx="9144000" cy="19050"/>
+          </a:xfrm>
+          <a:prstGeom prst="rect">
+            <a:avLst/>
+          </a:prstGeom>
+          <a:solidFill>
+            <a:srgbClr val="EEAA00"/>
+          </a:solidFill>
+          <a:ln w="0">
+            <a:noFill/>
+          </a:ln>
+        </p:spPr>
+      </p:sp>
+      <p:sp>
+        <p:nvSpPr>
+          <p:cNvPr id="402" name="WVU DSPIRA name"/>
+          <p:cNvSpPr>
+            <a:spLocks noGrp="1"/>
+          </p:cNvSpPr>
+          <p:nvPr/>
+        </p:nvSpPr>
+        <p:spPr>
+          <a:xfrm>
+            <a:off x="228600" y="19050"/>
+            <a:ext cx="2857500" cy="257175"/>
+          </a:xfrm>
+          <a:prstGeom prst="rect">
+            <a:avLst/>
+          </a:prstGeom>
+          <a:noFill/>
+          <a:ln w="0">
+            <a:noFill/>
+          </a:ln>
+        </p:spPr>
+        <p:txBody>
+          <a:bodyPr>
+            <a:noAutofit/>
+          </a:bodyPr>
+          <a:lstStyle/>
+          <a:p>
+            <a:pPr>
+              <a:defRPr sz="1600" b="1">
+                <a:solidFill>
+                  <a:srgbClr val="FFFFFF"/>
+                </a:solidFill>
+                <a:latin typeface="Arial"/>
+                <a:ea typeface="Arial"/>
+                <a:cs typeface="Arial"/>
+              </a:defRPr>
+            </a:pPr>
+            <a:r>
+              <a:rPr sz="1600" b="1">
+                <a:solidFill>
+                  <a:srgbClr val="FFFFFF"/>
+                </a:solidFill>
+                <a:latin typeface="Arial"/>
+                <a:ea typeface="Arial"/>
+                <a:cs typeface="Arial"/>
+              </a:rPr>
+              <a:t>WVU DSPIRA</a:t>
+            </a:r>
+          </a:p>
+        </p:txBody>
+      </p:sp>
+      <p:sp>
+        <p:nvSpPr>
+          <p:cNvPr id="403" name="WVU DSPIRA university"/>
+          <p:cNvSpPr>
+            <a:spLocks noGrp="1"/>
+          </p:cNvSpPr>
+          <p:nvPr/>
+        </p:nvSpPr>
+        <p:spPr>
+          <a:xfrm>
+            <a:off x="6286500" y="114300"/>
+            <a:ext cx="2628900" cy="171450"/>
+          </a:xfrm>
+          <a:prstGeom prst="rect">
+            <a:avLst/>
+          </a:prstGeom>
+          <a:noFill/>
+          <a:ln w="0">
+            <a:noFill/>
+          </a:ln>
+        </p:spPr>
+        <p:txBody>
+          <a:bodyPr>
+            <a:noAutofit/>
+          </a:bodyPr>
+          <a:lstStyle/>
+          <a:p>
+            <a:pPr algn="r">
+              <a:defRPr sz="900">
+                <a:solidFill>
+                  <a:srgbClr val="FFFFFF"/>
+                </a:solidFill>
+                <a:latin typeface="Arial"/>
+                <a:ea typeface="Arial"/>
+                <a:cs typeface="Arial"/>
+              </a:defRPr>
+            </a:pPr>
+            <a:r>
+              <a:rPr sz="900">
+                <a:solidFill>
+                  <a:srgbClr val="FFFFFF"/>
+                </a:solidFill>
+                <a:latin typeface="Arial"/>
+                <a:ea typeface="Arial"/>
+                <a:cs typeface="Arial"/>
+              </a:rPr>
+              <a:t>WEST VIRGINIA UNIVERSITY</a:t>
             </a:r>
           </a:p>
         </p:txBody>
@@ -38596,30 +39796,6 @@
       </p:pic>
       <p:sp>
         <p:nvSpPr>
-          <p:cNvPr id="253" name="DSPIRA 1"/>
-          <p:cNvSpPr>
-            <a:spLocks noGrp="1"/>
-          </p:cNvSpPr>
-          <p:nvPr/>
-        </p:nvSpPr>
-        <p:spPr>
-          <a:xfrm>
-            <a:off x="0" y="0"/>
-            <a:ext cx="9144000" cy="342900"/>
-          </a:xfrm>
-          <a:prstGeom prst="rect">
-            <a:avLst/>
-          </a:prstGeom>
-          <a:solidFill>
-            <a:srgbClr val="FFFFFF"/>
-          </a:solidFill>
-          <a:ln w="0">
-            <a:noFill/>
-          </a:ln>
-        </p:spPr>
-      </p:sp>
-      <p:sp>
-        <p:nvSpPr>
           <p:cNvPr id="254" name="DSPIRA 2"/>
           <p:cNvSpPr>
             <a:spLocks noGrp="1"/>
@@ -38641,57 +39817,6 @@
             <a:noFill/>
           </a:ln>
         </p:spPr>
-      </p:sp>
-      <p:sp>
-        <p:nvSpPr>
-          <p:cNvPr id="255" name="DSPIRA 3"/>
-          <p:cNvSpPr>
-            <a:spLocks noGrp="1"/>
-          </p:cNvSpPr>
-          <p:nvPr/>
-        </p:nvSpPr>
-        <p:spPr>
-          <a:xfrm>
-            <a:off x="228600" y="76200"/>
-            <a:ext cx="4762500" cy="228600"/>
-          </a:xfrm>
-          <a:prstGeom prst="rect">
-            <a:avLst/>
-          </a:prstGeom>
-          <a:noFill/>
-          <a:ln w="0">
-            <a:noFill/>
-          </a:ln>
-        </p:spPr>
-        <p:txBody>
-          <a:bodyPr>
-            <a:noAutofit/>
-          </a:bodyPr>
-          <a:lstStyle/>
-          <a:p>
-            <a:pPr>
-              <a:defRPr sz="1200" b="1">
-                <a:solidFill>
-                  <a:srgbClr val="002855"/>
-                </a:solidFill>
-                <a:latin typeface="Arial"/>
-                <a:ea typeface="Arial"/>
-                <a:cs typeface="Arial"/>
-              </a:defRPr>
-            </a:pPr>
-            <a:r>
-              <a:rPr sz="1200" b="1">
-                <a:solidFill>
-                  <a:srgbClr val="002855"/>
-                </a:solidFill>
-                <a:latin typeface="Arial"/>
-                <a:ea typeface="Arial"/>
-                <a:cs typeface="Arial"/>
-              </a:rPr>
-              <a:t>WVU DSPIRA</a:t>
-            </a:r>
-          </a:p>
-        </p:txBody>
       </p:sp>
       <p:sp>
         <p:nvSpPr>
@@ -38791,6 +39916,156 @@
                 <a:cs typeface="Arial"/>
               </a:rPr>
               <a:t>3 of 20</a:t>
+            </a:r>
+          </a:p>
+        </p:txBody>
+      </p:sp>
+      <p:sp>
+        <p:nvSpPr>
+          <p:cNvPr id="258" name="WVU DSPIRA navy band"/>
+          <p:cNvSpPr>
+            <a:spLocks noGrp="1"/>
+          </p:cNvSpPr>
+          <p:nvPr/>
+        </p:nvSpPr>
+        <p:spPr>
+          <a:xfrm>
+            <a:off x="0" y="0"/>
+            <a:ext cx="9144000" cy="323850"/>
+          </a:xfrm>
+          <a:prstGeom prst="rect">
+            <a:avLst/>
+          </a:prstGeom>
+          <a:solidFill>
+            <a:srgbClr val="002855"/>
+          </a:solidFill>
+          <a:ln w="0">
+            <a:noFill/>
+          </a:ln>
+        </p:spPr>
+      </p:sp>
+      <p:sp>
+        <p:nvSpPr>
+          <p:cNvPr id="259" name="WVU DSPIRA gold rule"/>
+          <p:cNvSpPr>
+            <a:spLocks noGrp="1"/>
+          </p:cNvSpPr>
+          <p:nvPr/>
+        </p:nvSpPr>
+        <p:spPr>
+          <a:xfrm>
+            <a:off x="0" y="323850"/>
+            <a:ext cx="9144000" cy="19050"/>
+          </a:xfrm>
+          <a:prstGeom prst="rect">
+            <a:avLst/>
+          </a:prstGeom>
+          <a:solidFill>
+            <a:srgbClr val="EEAA00"/>
+          </a:solidFill>
+          <a:ln w="0">
+            <a:noFill/>
+          </a:ln>
+        </p:spPr>
+      </p:sp>
+      <p:sp>
+        <p:nvSpPr>
+          <p:cNvPr id="260" name="WVU DSPIRA name"/>
+          <p:cNvSpPr>
+            <a:spLocks noGrp="1"/>
+          </p:cNvSpPr>
+          <p:nvPr/>
+        </p:nvSpPr>
+        <p:spPr>
+          <a:xfrm>
+            <a:off x="228600" y="19050"/>
+            <a:ext cx="2857500" cy="257175"/>
+          </a:xfrm>
+          <a:prstGeom prst="rect">
+            <a:avLst/>
+          </a:prstGeom>
+          <a:noFill/>
+          <a:ln w="0">
+            <a:noFill/>
+          </a:ln>
+        </p:spPr>
+        <p:txBody>
+          <a:bodyPr>
+            <a:noAutofit/>
+          </a:bodyPr>
+          <a:lstStyle/>
+          <a:p>
+            <a:pPr>
+              <a:defRPr sz="1600" b="1">
+                <a:solidFill>
+                  <a:srgbClr val="FFFFFF"/>
+                </a:solidFill>
+                <a:latin typeface="Arial"/>
+                <a:ea typeface="Arial"/>
+                <a:cs typeface="Arial"/>
+              </a:defRPr>
+            </a:pPr>
+            <a:r>
+              <a:rPr sz="1600" b="1">
+                <a:solidFill>
+                  <a:srgbClr val="FFFFFF"/>
+                </a:solidFill>
+                <a:latin typeface="Arial"/>
+                <a:ea typeface="Arial"/>
+                <a:cs typeface="Arial"/>
+              </a:rPr>
+              <a:t>WVU DSPIRA</a:t>
+            </a:r>
+          </a:p>
+        </p:txBody>
+      </p:sp>
+      <p:sp>
+        <p:nvSpPr>
+          <p:cNvPr id="261" name="WVU DSPIRA university"/>
+          <p:cNvSpPr>
+            <a:spLocks noGrp="1"/>
+          </p:cNvSpPr>
+          <p:nvPr/>
+        </p:nvSpPr>
+        <p:spPr>
+          <a:xfrm>
+            <a:off x="6286500" y="114300"/>
+            <a:ext cx="2628900" cy="171450"/>
+          </a:xfrm>
+          <a:prstGeom prst="rect">
+            <a:avLst/>
+          </a:prstGeom>
+          <a:noFill/>
+          <a:ln w="0">
+            <a:noFill/>
+          </a:ln>
+        </p:spPr>
+        <p:txBody>
+          <a:bodyPr>
+            <a:noAutofit/>
+          </a:bodyPr>
+          <a:lstStyle/>
+          <a:p>
+            <a:pPr algn="r">
+              <a:defRPr sz="900">
+                <a:solidFill>
+                  <a:srgbClr val="FFFFFF"/>
+                </a:solidFill>
+                <a:latin typeface="Arial"/>
+                <a:ea typeface="Arial"/>
+                <a:cs typeface="Arial"/>
+              </a:defRPr>
+            </a:pPr>
+            <a:r>
+              <a:rPr sz="900">
+                <a:solidFill>
+                  <a:srgbClr val="FFFFFF"/>
+                </a:solidFill>
+                <a:latin typeface="Arial"/>
+                <a:ea typeface="Arial"/>
+                <a:cs typeface="Arial"/>
+              </a:rPr>
+              <a:t>WEST VIRGINIA UNIVERSITY</a:t>
             </a:r>
           </a:p>
         </p:txBody>
@@ -39217,30 +40492,6 @@
       </p:pic>
       <p:sp>
         <p:nvSpPr>
-          <p:cNvPr id="260" name="DSPIRA 1"/>
-          <p:cNvSpPr>
-            <a:spLocks noGrp="1"/>
-          </p:cNvSpPr>
-          <p:nvPr/>
-        </p:nvSpPr>
-        <p:spPr>
-          <a:xfrm>
-            <a:off x="0" y="0"/>
-            <a:ext cx="9144000" cy="342900"/>
-          </a:xfrm>
-          <a:prstGeom prst="rect">
-            <a:avLst/>
-          </a:prstGeom>
-          <a:solidFill>
-            <a:srgbClr val="FFFFFF"/>
-          </a:solidFill>
-          <a:ln w="0">
-            <a:noFill/>
-          </a:ln>
-        </p:spPr>
-      </p:sp>
-      <p:sp>
-        <p:nvSpPr>
           <p:cNvPr id="261" name="DSPIRA 2"/>
           <p:cNvSpPr>
             <a:spLocks noGrp="1"/>
@@ -39262,57 +40513,6 @@
             <a:noFill/>
           </a:ln>
         </p:spPr>
-      </p:sp>
-      <p:sp>
-        <p:nvSpPr>
-          <p:cNvPr id="262" name="DSPIRA 3"/>
-          <p:cNvSpPr>
-            <a:spLocks noGrp="1"/>
-          </p:cNvSpPr>
-          <p:nvPr/>
-        </p:nvSpPr>
-        <p:spPr>
-          <a:xfrm>
-            <a:off x="228600" y="76200"/>
-            <a:ext cx="4762500" cy="228600"/>
-          </a:xfrm>
-          <a:prstGeom prst="rect">
-            <a:avLst/>
-          </a:prstGeom>
-          <a:noFill/>
-          <a:ln w="0">
-            <a:noFill/>
-          </a:ln>
-        </p:spPr>
-        <p:txBody>
-          <a:bodyPr>
-            <a:noAutofit/>
-          </a:bodyPr>
-          <a:lstStyle/>
-          <a:p>
-            <a:pPr>
-              <a:defRPr sz="1200" b="1">
-                <a:solidFill>
-                  <a:srgbClr val="002855"/>
-                </a:solidFill>
-                <a:latin typeface="Arial"/>
-                <a:ea typeface="Arial"/>
-                <a:cs typeface="Arial"/>
-              </a:defRPr>
-            </a:pPr>
-            <a:r>
-              <a:rPr sz="1200" b="1">
-                <a:solidFill>
-                  <a:srgbClr val="002855"/>
-                </a:solidFill>
-                <a:latin typeface="Arial"/>
-                <a:ea typeface="Arial"/>
-                <a:cs typeface="Arial"/>
-              </a:rPr>
-              <a:t>WVU DSPIRA</a:t>
-            </a:r>
-          </a:p>
-        </p:txBody>
       </p:sp>
       <p:sp>
         <p:nvSpPr>
@@ -39412,6 +40612,156 @@
                 <a:cs typeface="Arial"/>
               </a:rPr>
               <a:t>4 of 20</a:t>
+            </a:r>
+          </a:p>
+        </p:txBody>
+      </p:sp>
+      <p:sp>
+        <p:nvSpPr>
+          <p:cNvPr id="265" name="WVU DSPIRA navy band"/>
+          <p:cNvSpPr>
+            <a:spLocks noGrp="1"/>
+          </p:cNvSpPr>
+          <p:nvPr/>
+        </p:nvSpPr>
+        <p:spPr>
+          <a:xfrm>
+            <a:off x="0" y="0"/>
+            <a:ext cx="9144000" cy="323850"/>
+          </a:xfrm>
+          <a:prstGeom prst="rect">
+            <a:avLst/>
+          </a:prstGeom>
+          <a:solidFill>
+            <a:srgbClr val="002855"/>
+          </a:solidFill>
+          <a:ln w="0">
+            <a:noFill/>
+          </a:ln>
+        </p:spPr>
+      </p:sp>
+      <p:sp>
+        <p:nvSpPr>
+          <p:cNvPr id="266" name="WVU DSPIRA gold rule"/>
+          <p:cNvSpPr>
+            <a:spLocks noGrp="1"/>
+          </p:cNvSpPr>
+          <p:nvPr/>
+        </p:nvSpPr>
+        <p:spPr>
+          <a:xfrm>
+            <a:off x="0" y="323850"/>
+            <a:ext cx="9144000" cy="19050"/>
+          </a:xfrm>
+          <a:prstGeom prst="rect">
+            <a:avLst/>
+          </a:prstGeom>
+          <a:solidFill>
+            <a:srgbClr val="EEAA00"/>
+          </a:solidFill>
+          <a:ln w="0">
+            <a:noFill/>
+          </a:ln>
+        </p:spPr>
+      </p:sp>
+      <p:sp>
+        <p:nvSpPr>
+          <p:cNvPr id="267" name="WVU DSPIRA name"/>
+          <p:cNvSpPr>
+            <a:spLocks noGrp="1"/>
+          </p:cNvSpPr>
+          <p:nvPr/>
+        </p:nvSpPr>
+        <p:spPr>
+          <a:xfrm>
+            <a:off x="228600" y="19050"/>
+            <a:ext cx="2857500" cy="257175"/>
+          </a:xfrm>
+          <a:prstGeom prst="rect">
+            <a:avLst/>
+          </a:prstGeom>
+          <a:noFill/>
+          <a:ln w="0">
+            <a:noFill/>
+          </a:ln>
+        </p:spPr>
+        <p:txBody>
+          <a:bodyPr>
+            <a:noAutofit/>
+          </a:bodyPr>
+          <a:lstStyle/>
+          <a:p>
+            <a:pPr>
+              <a:defRPr sz="1600" b="1">
+                <a:solidFill>
+                  <a:srgbClr val="FFFFFF"/>
+                </a:solidFill>
+                <a:latin typeface="Arial"/>
+                <a:ea typeface="Arial"/>
+                <a:cs typeface="Arial"/>
+              </a:defRPr>
+            </a:pPr>
+            <a:r>
+              <a:rPr sz="1600" b="1">
+                <a:solidFill>
+                  <a:srgbClr val="FFFFFF"/>
+                </a:solidFill>
+                <a:latin typeface="Arial"/>
+                <a:ea typeface="Arial"/>
+                <a:cs typeface="Arial"/>
+              </a:rPr>
+              <a:t>WVU DSPIRA</a:t>
+            </a:r>
+          </a:p>
+        </p:txBody>
+      </p:sp>
+      <p:sp>
+        <p:nvSpPr>
+          <p:cNvPr id="268" name="WVU DSPIRA university"/>
+          <p:cNvSpPr>
+            <a:spLocks noGrp="1"/>
+          </p:cNvSpPr>
+          <p:nvPr/>
+        </p:nvSpPr>
+        <p:spPr>
+          <a:xfrm>
+            <a:off x="6286500" y="114300"/>
+            <a:ext cx="2628900" cy="171450"/>
+          </a:xfrm>
+          <a:prstGeom prst="rect">
+            <a:avLst/>
+          </a:prstGeom>
+          <a:noFill/>
+          <a:ln w="0">
+            <a:noFill/>
+          </a:ln>
+        </p:spPr>
+        <p:txBody>
+          <a:bodyPr>
+            <a:noAutofit/>
+          </a:bodyPr>
+          <a:lstStyle/>
+          <a:p>
+            <a:pPr algn="r">
+              <a:defRPr sz="900">
+                <a:solidFill>
+                  <a:srgbClr val="FFFFFF"/>
+                </a:solidFill>
+                <a:latin typeface="Arial"/>
+                <a:ea typeface="Arial"/>
+                <a:cs typeface="Arial"/>
+              </a:defRPr>
+            </a:pPr>
+            <a:r>
+              <a:rPr sz="900">
+                <a:solidFill>
+                  <a:srgbClr val="FFFFFF"/>
+                </a:solidFill>
+                <a:latin typeface="Arial"/>
+                <a:ea typeface="Arial"/>
+                <a:cs typeface="Arial"/>
+              </a:rPr>
+              <a:t>WEST VIRGINIA UNIVERSITY</a:t>
             </a:r>
           </a:p>
         </p:txBody>
@@ -39905,30 +41255,6 @@
       </p:pic>
       <p:sp>
         <p:nvSpPr>
-          <p:cNvPr id="268" name="DSPIRA 1"/>
-          <p:cNvSpPr>
-            <a:spLocks noGrp="1"/>
-          </p:cNvSpPr>
-          <p:nvPr/>
-        </p:nvSpPr>
-        <p:spPr>
-          <a:xfrm>
-            <a:off x="0" y="0"/>
-            <a:ext cx="9144000" cy="342900"/>
-          </a:xfrm>
-          <a:prstGeom prst="rect">
-            <a:avLst/>
-          </a:prstGeom>
-          <a:solidFill>
-            <a:srgbClr val="FFFFFF"/>
-          </a:solidFill>
-          <a:ln w="0">
-            <a:noFill/>
-          </a:ln>
-        </p:spPr>
-      </p:sp>
-      <p:sp>
-        <p:nvSpPr>
           <p:cNvPr id="269" name="DSPIRA 2"/>
           <p:cNvSpPr>
             <a:spLocks noGrp="1"/>
@@ -39950,57 +41276,6 @@
             <a:noFill/>
           </a:ln>
         </p:spPr>
-      </p:sp>
-      <p:sp>
-        <p:nvSpPr>
-          <p:cNvPr id="270" name="DSPIRA 3"/>
-          <p:cNvSpPr>
-            <a:spLocks noGrp="1"/>
-          </p:cNvSpPr>
-          <p:nvPr/>
-        </p:nvSpPr>
-        <p:spPr>
-          <a:xfrm>
-            <a:off x="228600" y="76200"/>
-            <a:ext cx="4762500" cy="228600"/>
-          </a:xfrm>
-          <a:prstGeom prst="rect">
-            <a:avLst/>
-          </a:prstGeom>
-          <a:noFill/>
-          <a:ln w="0">
-            <a:noFill/>
-          </a:ln>
-        </p:spPr>
-        <p:txBody>
-          <a:bodyPr>
-            <a:noAutofit/>
-          </a:bodyPr>
-          <a:lstStyle/>
-          <a:p>
-            <a:pPr>
-              <a:defRPr sz="1200" b="1">
-                <a:solidFill>
-                  <a:srgbClr val="002855"/>
-                </a:solidFill>
-                <a:latin typeface="Arial"/>
-                <a:ea typeface="Arial"/>
-                <a:cs typeface="Arial"/>
-              </a:defRPr>
-            </a:pPr>
-            <a:r>
-              <a:rPr sz="1200" b="1">
-                <a:solidFill>
-                  <a:srgbClr val="002855"/>
-                </a:solidFill>
-                <a:latin typeface="Arial"/>
-                <a:ea typeface="Arial"/>
-                <a:cs typeface="Arial"/>
-              </a:rPr>
-              <a:t>WVU DSPIRA</a:t>
-            </a:r>
-          </a:p>
-        </p:txBody>
       </p:sp>
       <p:sp>
         <p:nvSpPr>
@@ -40100,6 +41375,156 @@
                 <a:cs typeface="Arial"/>
               </a:rPr>
               <a:t>5 of 20</a:t>
+            </a:r>
+          </a:p>
+        </p:txBody>
+      </p:sp>
+      <p:sp>
+        <p:nvSpPr>
+          <p:cNvPr id="273" name="WVU DSPIRA navy band"/>
+          <p:cNvSpPr>
+            <a:spLocks noGrp="1"/>
+          </p:cNvSpPr>
+          <p:nvPr/>
+        </p:nvSpPr>
+        <p:spPr>
+          <a:xfrm>
+            <a:off x="0" y="0"/>
+            <a:ext cx="9144000" cy="323850"/>
+          </a:xfrm>
+          <a:prstGeom prst="rect">
+            <a:avLst/>
+          </a:prstGeom>
+          <a:solidFill>
+            <a:srgbClr val="002855"/>
+          </a:solidFill>
+          <a:ln w="0">
+            <a:noFill/>
+          </a:ln>
+        </p:spPr>
+      </p:sp>
+      <p:sp>
+        <p:nvSpPr>
+          <p:cNvPr id="274" name="WVU DSPIRA gold rule"/>
+          <p:cNvSpPr>
+            <a:spLocks noGrp="1"/>
+          </p:cNvSpPr>
+          <p:nvPr/>
+        </p:nvSpPr>
+        <p:spPr>
+          <a:xfrm>
+            <a:off x="0" y="323850"/>
+            <a:ext cx="9144000" cy="19050"/>
+          </a:xfrm>
+          <a:prstGeom prst="rect">
+            <a:avLst/>
+          </a:prstGeom>
+          <a:solidFill>
+            <a:srgbClr val="EEAA00"/>
+          </a:solidFill>
+          <a:ln w="0">
+            <a:noFill/>
+          </a:ln>
+        </p:spPr>
+      </p:sp>
+      <p:sp>
+        <p:nvSpPr>
+          <p:cNvPr id="275" name="WVU DSPIRA name"/>
+          <p:cNvSpPr>
+            <a:spLocks noGrp="1"/>
+          </p:cNvSpPr>
+          <p:nvPr/>
+        </p:nvSpPr>
+        <p:spPr>
+          <a:xfrm>
+            <a:off x="228600" y="19050"/>
+            <a:ext cx="2857500" cy="257175"/>
+          </a:xfrm>
+          <a:prstGeom prst="rect">
+            <a:avLst/>
+          </a:prstGeom>
+          <a:noFill/>
+          <a:ln w="0">
+            <a:noFill/>
+          </a:ln>
+        </p:spPr>
+        <p:txBody>
+          <a:bodyPr>
+            <a:noAutofit/>
+          </a:bodyPr>
+          <a:lstStyle/>
+          <a:p>
+            <a:pPr>
+              <a:defRPr sz="1600" b="1">
+                <a:solidFill>
+                  <a:srgbClr val="FFFFFF"/>
+                </a:solidFill>
+                <a:latin typeface="Arial"/>
+                <a:ea typeface="Arial"/>
+                <a:cs typeface="Arial"/>
+              </a:defRPr>
+            </a:pPr>
+            <a:r>
+              <a:rPr sz="1600" b="1">
+                <a:solidFill>
+                  <a:srgbClr val="FFFFFF"/>
+                </a:solidFill>
+                <a:latin typeface="Arial"/>
+                <a:ea typeface="Arial"/>
+                <a:cs typeface="Arial"/>
+              </a:rPr>
+              <a:t>WVU DSPIRA</a:t>
+            </a:r>
+          </a:p>
+        </p:txBody>
+      </p:sp>
+      <p:sp>
+        <p:nvSpPr>
+          <p:cNvPr id="276" name="WVU DSPIRA university"/>
+          <p:cNvSpPr>
+            <a:spLocks noGrp="1"/>
+          </p:cNvSpPr>
+          <p:nvPr/>
+        </p:nvSpPr>
+        <p:spPr>
+          <a:xfrm>
+            <a:off x="6286500" y="114300"/>
+            <a:ext cx="2628900" cy="171450"/>
+          </a:xfrm>
+          <a:prstGeom prst="rect">
+            <a:avLst/>
+          </a:prstGeom>
+          <a:noFill/>
+          <a:ln w="0">
+            <a:noFill/>
+          </a:ln>
+        </p:spPr>
+        <p:txBody>
+          <a:bodyPr>
+            <a:noAutofit/>
+          </a:bodyPr>
+          <a:lstStyle/>
+          <a:p>
+            <a:pPr algn="r">
+              <a:defRPr sz="900">
+                <a:solidFill>
+                  <a:srgbClr val="FFFFFF"/>
+                </a:solidFill>
+                <a:latin typeface="Arial"/>
+                <a:ea typeface="Arial"/>
+                <a:cs typeface="Arial"/>
+              </a:defRPr>
+            </a:pPr>
+            <a:r>
+              <a:rPr sz="900">
+                <a:solidFill>
+                  <a:srgbClr val="FFFFFF"/>
+                </a:solidFill>
+                <a:latin typeface="Arial"/>
+                <a:ea typeface="Arial"/>
+                <a:cs typeface="Arial"/>
+              </a:rPr>
+              <a:t>WEST VIRGINIA UNIVERSITY</a:t>
             </a:r>
           </a:p>
         </p:txBody>
@@ -40277,30 +41702,6 @@
       </p:pic>
       <p:sp>
         <p:nvSpPr>
-          <p:cNvPr id="275" name="DSPIRA 1"/>
-          <p:cNvSpPr>
-            <a:spLocks noGrp="1"/>
-          </p:cNvSpPr>
-          <p:nvPr/>
-        </p:nvSpPr>
-        <p:spPr>
-          <a:xfrm>
-            <a:off x="0" y="0"/>
-            <a:ext cx="9144000" cy="342900"/>
-          </a:xfrm>
-          <a:prstGeom prst="rect">
-            <a:avLst/>
-          </a:prstGeom>
-          <a:solidFill>
-            <a:srgbClr val="FFFFFF"/>
-          </a:solidFill>
-          <a:ln w="0">
-            <a:noFill/>
-          </a:ln>
-        </p:spPr>
-      </p:sp>
-      <p:sp>
-        <p:nvSpPr>
           <p:cNvPr id="276" name="DSPIRA 2"/>
           <p:cNvSpPr>
             <a:spLocks noGrp="1"/>
@@ -40322,57 +41723,6 @@
             <a:noFill/>
           </a:ln>
         </p:spPr>
-      </p:sp>
-      <p:sp>
-        <p:nvSpPr>
-          <p:cNvPr id="277" name="DSPIRA 3"/>
-          <p:cNvSpPr>
-            <a:spLocks noGrp="1"/>
-          </p:cNvSpPr>
-          <p:nvPr/>
-        </p:nvSpPr>
-        <p:spPr>
-          <a:xfrm>
-            <a:off x="228600" y="76200"/>
-            <a:ext cx="4762500" cy="228600"/>
-          </a:xfrm>
-          <a:prstGeom prst="rect">
-            <a:avLst/>
-          </a:prstGeom>
-          <a:noFill/>
-          <a:ln w="0">
-            <a:noFill/>
-          </a:ln>
-        </p:spPr>
-        <p:txBody>
-          <a:bodyPr>
-            <a:noAutofit/>
-          </a:bodyPr>
-          <a:lstStyle/>
-          <a:p>
-            <a:pPr>
-              <a:defRPr sz="1200" b="1">
-                <a:solidFill>
-                  <a:srgbClr val="002855"/>
-                </a:solidFill>
-                <a:latin typeface="Arial"/>
-                <a:ea typeface="Arial"/>
-                <a:cs typeface="Arial"/>
-              </a:defRPr>
-            </a:pPr>
-            <a:r>
-              <a:rPr sz="1200" b="1">
-                <a:solidFill>
-                  <a:srgbClr val="002855"/>
-                </a:solidFill>
-                <a:latin typeface="Arial"/>
-                <a:ea typeface="Arial"/>
-                <a:cs typeface="Arial"/>
-              </a:rPr>
-              <a:t>WVU DSPIRA</a:t>
-            </a:r>
-          </a:p>
-        </p:txBody>
       </p:sp>
       <p:sp>
         <p:nvSpPr>
@@ -40472,6 +41822,156 @@
                 <a:cs typeface="Arial"/>
               </a:rPr>
               <a:t>6 of 20</a:t>
+            </a:r>
+          </a:p>
+        </p:txBody>
+      </p:sp>
+      <p:sp>
+        <p:nvSpPr>
+          <p:cNvPr id="280" name="WVU DSPIRA navy band"/>
+          <p:cNvSpPr>
+            <a:spLocks noGrp="1"/>
+          </p:cNvSpPr>
+          <p:nvPr/>
+        </p:nvSpPr>
+        <p:spPr>
+          <a:xfrm>
+            <a:off x="0" y="0"/>
+            <a:ext cx="9144000" cy="323850"/>
+          </a:xfrm>
+          <a:prstGeom prst="rect">
+            <a:avLst/>
+          </a:prstGeom>
+          <a:solidFill>
+            <a:srgbClr val="002855"/>
+          </a:solidFill>
+          <a:ln w="0">
+            <a:noFill/>
+          </a:ln>
+        </p:spPr>
+      </p:sp>
+      <p:sp>
+        <p:nvSpPr>
+          <p:cNvPr id="281" name="WVU DSPIRA gold rule"/>
+          <p:cNvSpPr>
+            <a:spLocks noGrp="1"/>
+          </p:cNvSpPr>
+          <p:nvPr/>
+        </p:nvSpPr>
+        <p:spPr>
+          <a:xfrm>
+            <a:off x="0" y="323850"/>
+            <a:ext cx="9144000" cy="19050"/>
+          </a:xfrm>
+          <a:prstGeom prst="rect">
+            <a:avLst/>
+          </a:prstGeom>
+          <a:solidFill>
+            <a:srgbClr val="EEAA00"/>
+          </a:solidFill>
+          <a:ln w="0">
+            <a:noFill/>
+          </a:ln>
+        </p:spPr>
+      </p:sp>
+      <p:sp>
+        <p:nvSpPr>
+          <p:cNvPr id="282" name="WVU DSPIRA name"/>
+          <p:cNvSpPr>
+            <a:spLocks noGrp="1"/>
+          </p:cNvSpPr>
+          <p:nvPr/>
+        </p:nvSpPr>
+        <p:spPr>
+          <a:xfrm>
+            <a:off x="228600" y="19050"/>
+            <a:ext cx="2857500" cy="257175"/>
+          </a:xfrm>
+          <a:prstGeom prst="rect">
+            <a:avLst/>
+          </a:prstGeom>
+          <a:noFill/>
+          <a:ln w="0">
+            <a:noFill/>
+          </a:ln>
+        </p:spPr>
+        <p:txBody>
+          <a:bodyPr>
+            <a:noAutofit/>
+          </a:bodyPr>
+          <a:lstStyle/>
+          <a:p>
+            <a:pPr>
+              <a:defRPr sz="1600" b="1">
+                <a:solidFill>
+                  <a:srgbClr val="FFFFFF"/>
+                </a:solidFill>
+                <a:latin typeface="Arial"/>
+                <a:ea typeface="Arial"/>
+                <a:cs typeface="Arial"/>
+              </a:defRPr>
+            </a:pPr>
+            <a:r>
+              <a:rPr sz="1600" b="1">
+                <a:solidFill>
+                  <a:srgbClr val="FFFFFF"/>
+                </a:solidFill>
+                <a:latin typeface="Arial"/>
+                <a:ea typeface="Arial"/>
+                <a:cs typeface="Arial"/>
+              </a:rPr>
+              <a:t>WVU DSPIRA</a:t>
+            </a:r>
+          </a:p>
+        </p:txBody>
+      </p:sp>
+      <p:sp>
+        <p:nvSpPr>
+          <p:cNvPr id="283" name="WVU DSPIRA university"/>
+          <p:cNvSpPr>
+            <a:spLocks noGrp="1"/>
+          </p:cNvSpPr>
+          <p:nvPr/>
+        </p:nvSpPr>
+        <p:spPr>
+          <a:xfrm>
+            <a:off x="6286500" y="114300"/>
+            <a:ext cx="2628900" cy="171450"/>
+          </a:xfrm>
+          <a:prstGeom prst="rect">
+            <a:avLst/>
+          </a:prstGeom>
+          <a:noFill/>
+          <a:ln w="0">
+            <a:noFill/>
+          </a:ln>
+        </p:spPr>
+        <p:txBody>
+          <a:bodyPr>
+            <a:noAutofit/>
+          </a:bodyPr>
+          <a:lstStyle/>
+          <a:p>
+            <a:pPr algn="r">
+              <a:defRPr sz="900">
+                <a:solidFill>
+                  <a:srgbClr val="FFFFFF"/>
+                </a:solidFill>
+                <a:latin typeface="Arial"/>
+                <a:ea typeface="Arial"/>
+                <a:cs typeface="Arial"/>
+              </a:defRPr>
+            </a:pPr>
+            <a:r>
+              <a:rPr sz="900">
+                <a:solidFill>
+                  <a:srgbClr val="FFFFFF"/>
+                </a:solidFill>
+                <a:latin typeface="Arial"/>
+                <a:ea typeface="Arial"/>
+                <a:cs typeface="Arial"/>
+              </a:rPr>
+              <a:t>WEST VIRGINIA UNIVERSITY</a:t>
             </a:r>
           </a:p>
         </p:txBody>
@@ -40649,30 +42149,6 @@
       </p:pic>
       <p:sp>
         <p:nvSpPr>
-          <p:cNvPr id="282" name="DSPIRA 1"/>
-          <p:cNvSpPr>
-            <a:spLocks noGrp="1"/>
-          </p:cNvSpPr>
-          <p:nvPr/>
-        </p:nvSpPr>
-        <p:spPr>
-          <a:xfrm>
-            <a:off x="0" y="0"/>
-            <a:ext cx="9144000" cy="342900"/>
-          </a:xfrm>
-          <a:prstGeom prst="rect">
-            <a:avLst/>
-          </a:prstGeom>
-          <a:solidFill>
-            <a:srgbClr val="FFFFFF"/>
-          </a:solidFill>
-          <a:ln w="0">
-            <a:noFill/>
-          </a:ln>
-        </p:spPr>
-      </p:sp>
-      <p:sp>
-        <p:nvSpPr>
           <p:cNvPr id="283" name="DSPIRA 2"/>
           <p:cNvSpPr>
             <a:spLocks noGrp="1"/>
@@ -40694,57 +42170,6 @@
             <a:noFill/>
           </a:ln>
         </p:spPr>
-      </p:sp>
-      <p:sp>
-        <p:nvSpPr>
-          <p:cNvPr id="284" name="DSPIRA 3"/>
-          <p:cNvSpPr>
-            <a:spLocks noGrp="1"/>
-          </p:cNvSpPr>
-          <p:nvPr/>
-        </p:nvSpPr>
-        <p:spPr>
-          <a:xfrm>
-            <a:off x="228600" y="76200"/>
-            <a:ext cx="4762500" cy="228600"/>
-          </a:xfrm>
-          <a:prstGeom prst="rect">
-            <a:avLst/>
-          </a:prstGeom>
-          <a:noFill/>
-          <a:ln w="0">
-            <a:noFill/>
-          </a:ln>
-        </p:spPr>
-        <p:txBody>
-          <a:bodyPr>
-            <a:noAutofit/>
-          </a:bodyPr>
-          <a:lstStyle/>
-          <a:p>
-            <a:pPr>
-              <a:defRPr sz="1200" b="1">
-                <a:solidFill>
-                  <a:srgbClr val="002855"/>
-                </a:solidFill>
-                <a:latin typeface="Arial"/>
-                <a:ea typeface="Arial"/>
-                <a:cs typeface="Arial"/>
-              </a:defRPr>
-            </a:pPr>
-            <a:r>
-              <a:rPr sz="1200" b="1">
-                <a:solidFill>
-                  <a:srgbClr val="002855"/>
-                </a:solidFill>
-                <a:latin typeface="Arial"/>
-                <a:ea typeface="Arial"/>
-                <a:cs typeface="Arial"/>
-              </a:rPr>
-              <a:t>WVU DSPIRA</a:t>
-            </a:r>
-          </a:p>
-        </p:txBody>
       </p:sp>
       <p:sp>
         <p:nvSpPr>
@@ -40844,6 +42269,156 @@
                 <a:cs typeface="Arial"/>
               </a:rPr>
               <a:t>7 of 20</a:t>
+            </a:r>
+          </a:p>
+        </p:txBody>
+      </p:sp>
+      <p:sp>
+        <p:nvSpPr>
+          <p:cNvPr id="287" name="WVU DSPIRA navy band"/>
+          <p:cNvSpPr>
+            <a:spLocks noGrp="1"/>
+          </p:cNvSpPr>
+          <p:nvPr/>
+        </p:nvSpPr>
+        <p:spPr>
+          <a:xfrm>
+            <a:off x="0" y="0"/>
+            <a:ext cx="9144000" cy="323850"/>
+          </a:xfrm>
+          <a:prstGeom prst="rect">
+            <a:avLst/>
+          </a:prstGeom>
+          <a:solidFill>
+            <a:srgbClr val="002855"/>
+          </a:solidFill>
+          <a:ln w="0">
+            <a:noFill/>
+          </a:ln>
+        </p:spPr>
+      </p:sp>
+      <p:sp>
+        <p:nvSpPr>
+          <p:cNvPr id="288" name="WVU DSPIRA gold rule"/>
+          <p:cNvSpPr>
+            <a:spLocks noGrp="1"/>
+          </p:cNvSpPr>
+          <p:nvPr/>
+        </p:nvSpPr>
+        <p:spPr>
+          <a:xfrm>
+            <a:off x="0" y="323850"/>
+            <a:ext cx="9144000" cy="19050"/>
+          </a:xfrm>
+          <a:prstGeom prst="rect">
+            <a:avLst/>
+          </a:prstGeom>
+          <a:solidFill>
+            <a:srgbClr val="EEAA00"/>
+          </a:solidFill>
+          <a:ln w="0">
+            <a:noFill/>
+          </a:ln>
+        </p:spPr>
+      </p:sp>
+      <p:sp>
+        <p:nvSpPr>
+          <p:cNvPr id="289" name="WVU DSPIRA name"/>
+          <p:cNvSpPr>
+            <a:spLocks noGrp="1"/>
+          </p:cNvSpPr>
+          <p:nvPr/>
+        </p:nvSpPr>
+        <p:spPr>
+          <a:xfrm>
+            <a:off x="228600" y="19050"/>
+            <a:ext cx="2857500" cy="257175"/>
+          </a:xfrm>
+          <a:prstGeom prst="rect">
+            <a:avLst/>
+          </a:prstGeom>
+          <a:noFill/>
+          <a:ln w="0">
+            <a:noFill/>
+          </a:ln>
+        </p:spPr>
+        <p:txBody>
+          <a:bodyPr>
+            <a:noAutofit/>
+          </a:bodyPr>
+          <a:lstStyle/>
+          <a:p>
+            <a:pPr>
+              <a:defRPr sz="1600" b="1">
+                <a:solidFill>
+                  <a:srgbClr val="FFFFFF"/>
+                </a:solidFill>
+                <a:latin typeface="Arial"/>
+                <a:ea typeface="Arial"/>
+                <a:cs typeface="Arial"/>
+              </a:defRPr>
+            </a:pPr>
+            <a:r>
+              <a:rPr sz="1600" b="1">
+                <a:solidFill>
+                  <a:srgbClr val="FFFFFF"/>
+                </a:solidFill>
+                <a:latin typeface="Arial"/>
+                <a:ea typeface="Arial"/>
+                <a:cs typeface="Arial"/>
+              </a:rPr>
+              <a:t>WVU DSPIRA</a:t>
+            </a:r>
+          </a:p>
+        </p:txBody>
+      </p:sp>
+      <p:sp>
+        <p:nvSpPr>
+          <p:cNvPr id="290" name="WVU DSPIRA university"/>
+          <p:cNvSpPr>
+            <a:spLocks noGrp="1"/>
+          </p:cNvSpPr>
+          <p:nvPr/>
+        </p:nvSpPr>
+        <p:spPr>
+          <a:xfrm>
+            <a:off x="6286500" y="114300"/>
+            <a:ext cx="2628900" cy="171450"/>
+          </a:xfrm>
+          <a:prstGeom prst="rect">
+            <a:avLst/>
+          </a:prstGeom>
+          <a:noFill/>
+          <a:ln w="0">
+            <a:noFill/>
+          </a:ln>
+        </p:spPr>
+        <p:txBody>
+          <a:bodyPr>
+            <a:noAutofit/>
+          </a:bodyPr>
+          <a:lstStyle/>
+          <a:p>
+            <a:pPr algn="r">
+              <a:defRPr sz="900">
+                <a:solidFill>
+                  <a:srgbClr val="FFFFFF"/>
+                </a:solidFill>
+                <a:latin typeface="Arial"/>
+                <a:ea typeface="Arial"/>
+                <a:cs typeface="Arial"/>
+              </a:defRPr>
+            </a:pPr>
+            <a:r>
+              <a:rPr sz="900">
+                <a:solidFill>
+                  <a:srgbClr val="FFFFFF"/>
+                </a:solidFill>
+                <a:latin typeface="Arial"/>
+                <a:ea typeface="Arial"/>
+                <a:cs typeface="Arial"/>
+              </a:rPr>
+              <a:t>WEST VIRGINIA UNIVERSITY</a:t>
             </a:r>
           </a:p>
         </p:txBody>
@@ -41012,30 +42587,6 @@
       </p:sp>
       <p:sp>
         <p:nvSpPr>
-          <p:cNvPr id="288" name="DSPIRA 1"/>
-          <p:cNvSpPr>
-            <a:spLocks noGrp="1"/>
-          </p:cNvSpPr>
-          <p:nvPr/>
-        </p:nvSpPr>
-        <p:spPr>
-          <a:xfrm>
-            <a:off x="0" y="0"/>
-            <a:ext cx="9144000" cy="342900"/>
-          </a:xfrm>
-          <a:prstGeom prst="rect">
-            <a:avLst/>
-          </a:prstGeom>
-          <a:solidFill>
-            <a:srgbClr val="FFFFFF"/>
-          </a:solidFill>
-          <a:ln w="0">
-            <a:noFill/>
-          </a:ln>
-        </p:spPr>
-      </p:sp>
-      <p:sp>
-        <p:nvSpPr>
           <p:cNvPr id="289" name="DSPIRA 2"/>
           <p:cNvSpPr>
             <a:spLocks noGrp="1"/>
@@ -41057,57 +42608,6 @@
             <a:noFill/>
           </a:ln>
         </p:spPr>
-      </p:sp>
-      <p:sp>
-        <p:nvSpPr>
-          <p:cNvPr id="290" name="DSPIRA 3"/>
-          <p:cNvSpPr>
-            <a:spLocks noGrp="1"/>
-          </p:cNvSpPr>
-          <p:nvPr/>
-        </p:nvSpPr>
-        <p:spPr>
-          <a:xfrm>
-            <a:off x="228600" y="76200"/>
-            <a:ext cx="4762500" cy="228600"/>
-          </a:xfrm>
-          <a:prstGeom prst="rect">
-            <a:avLst/>
-          </a:prstGeom>
-          <a:noFill/>
-          <a:ln w="0">
-            <a:noFill/>
-          </a:ln>
-        </p:spPr>
-        <p:txBody>
-          <a:bodyPr>
-            <a:noAutofit/>
-          </a:bodyPr>
-          <a:lstStyle/>
-          <a:p>
-            <a:pPr>
-              <a:defRPr sz="1200" b="1">
-                <a:solidFill>
-                  <a:srgbClr val="002855"/>
-                </a:solidFill>
-                <a:latin typeface="Arial"/>
-                <a:ea typeface="Arial"/>
-                <a:cs typeface="Arial"/>
-              </a:defRPr>
-            </a:pPr>
-            <a:r>
-              <a:rPr sz="1200" b="1">
-                <a:solidFill>
-                  <a:srgbClr val="002855"/>
-                </a:solidFill>
-                <a:latin typeface="Arial"/>
-                <a:ea typeface="Arial"/>
-                <a:cs typeface="Arial"/>
-              </a:rPr>
-              <a:t>WVU DSPIRA</a:t>
-            </a:r>
-          </a:p>
-        </p:txBody>
       </p:sp>
       <p:sp>
         <p:nvSpPr>
@@ -41207,6 +42707,156 @@
                 <a:cs typeface="Arial"/>
               </a:rPr>
               <a:t>Supplemental</a:t>
+            </a:r>
+          </a:p>
+        </p:txBody>
+      </p:sp>
+      <p:sp>
+        <p:nvSpPr>
+          <p:cNvPr id="293" name="WVU DSPIRA navy band"/>
+          <p:cNvSpPr>
+            <a:spLocks noGrp="1"/>
+          </p:cNvSpPr>
+          <p:nvPr/>
+        </p:nvSpPr>
+        <p:spPr>
+          <a:xfrm>
+            <a:off x="0" y="0"/>
+            <a:ext cx="9144000" cy="323850"/>
+          </a:xfrm>
+          <a:prstGeom prst="rect">
+            <a:avLst/>
+          </a:prstGeom>
+          <a:solidFill>
+            <a:srgbClr val="002855"/>
+          </a:solidFill>
+          <a:ln w="0">
+            <a:noFill/>
+          </a:ln>
+        </p:spPr>
+      </p:sp>
+      <p:sp>
+        <p:nvSpPr>
+          <p:cNvPr id="294" name="WVU DSPIRA gold rule"/>
+          <p:cNvSpPr>
+            <a:spLocks noGrp="1"/>
+          </p:cNvSpPr>
+          <p:nvPr/>
+        </p:nvSpPr>
+        <p:spPr>
+          <a:xfrm>
+            <a:off x="0" y="323850"/>
+            <a:ext cx="9144000" cy="19050"/>
+          </a:xfrm>
+          <a:prstGeom prst="rect">
+            <a:avLst/>
+          </a:prstGeom>
+          <a:solidFill>
+            <a:srgbClr val="EEAA00"/>
+          </a:solidFill>
+          <a:ln w="0">
+            <a:noFill/>
+          </a:ln>
+        </p:spPr>
+      </p:sp>
+      <p:sp>
+        <p:nvSpPr>
+          <p:cNvPr id="295" name="WVU DSPIRA name"/>
+          <p:cNvSpPr>
+            <a:spLocks noGrp="1"/>
+          </p:cNvSpPr>
+          <p:nvPr/>
+        </p:nvSpPr>
+        <p:spPr>
+          <a:xfrm>
+            <a:off x="228600" y="19050"/>
+            <a:ext cx="2857500" cy="257175"/>
+          </a:xfrm>
+          <a:prstGeom prst="rect">
+            <a:avLst/>
+          </a:prstGeom>
+          <a:noFill/>
+          <a:ln w="0">
+            <a:noFill/>
+          </a:ln>
+        </p:spPr>
+        <p:txBody>
+          <a:bodyPr>
+            <a:noAutofit/>
+          </a:bodyPr>
+          <a:lstStyle/>
+          <a:p>
+            <a:pPr>
+              <a:defRPr sz="1600" b="1">
+                <a:solidFill>
+                  <a:srgbClr val="FFFFFF"/>
+                </a:solidFill>
+                <a:latin typeface="Arial"/>
+                <a:ea typeface="Arial"/>
+                <a:cs typeface="Arial"/>
+              </a:defRPr>
+            </a:pPr>
+            <a:r>
+              <a:rPr sz="1600" b="1">
+                <a:solidFill>
+                  <a:srgbClr val="FFFFFF"/>
+                </a:solidFill>
+                <a:latin typeface="Arial"/>
+                <a:ea typeface="Arial"/>
+                <a:cs typeface="Arial"/>
+              </a:rPr>
+              <a:t>WVU DSPIRA</a:t>
+            </a:r>
+          </a:p>
+        </p:txBody>
+      </p:sp>
+      <p:sp>
+        <p:nvSpPr>
+          <p:cNvPr id="296" name="WVU DSPIRA university"/>
+          <p:cNvSpPr>
+            <a:spLocks noGrp="1"/>
+          </p:cNvSpPr>
+          <p:nvPr/>
+        </p:nvSpPr>
+        <p:spPr>
+          <a:xfrm>
+            <a:off x="6286500" y="114300"/>
+            <a:ext cx="2628900" cy="171450"/>
+          </a:xfrm>
+          <a:prstGeom prst="rect">
+            <a:avLst/>
+          </a:prstGeom>
+          <a:noFill/>
+          <a:ln w="0">
+            <a:noFill/>
+          </a:ln>
+        </p:spPr>
+        <p:txBody>
+          <a:bodyPr>
+            <a:noAutofit/>
+          </a:bodyPr>
+          <a:lstStyle/>
+          <a:p>
+            <a:pPr algn="r">
+              <a:defRPr sz="900">
+                <a:solidFill>
+                  <a:srgbClr val="FFFFFF"/>
+                </a:solidFill>
+                <a:latin typeface="Arial"/>
+                <a:ea typeface="Arial"/>
+                <a:cs typeface="Arial"/>
+              </a:defRPr>
+            </a:pPr>
+            <a:r>
+              <a:rPr sz="900">
+                <a:solidFill>
+                  <a:srgbClr val="FFFFFF"/>
+                </a:solidFill>
+                <a:latin typeface="Arial"/>
+                <a:ea typeface="Arial"/>
+                <a:cs typeface="Arial"/>
+              </a:rPr>
+              <a:t>WEST VIRGINIA UNIVERSITY</a:t>
             </a:r>
           </a:p>
         </p:txBody>
@@ -41621,30 +43271,6 @@
       </p:pic>
       <p:sp>
         <p:nvSpPr>
-          <p:cNvPr id="296" name="DSPIRA 1"/>
-          <p:cNvSpPr>
-            <a:spLocks noGrp="1"/>
-          </p:cNvSpPr>
-          <p:nvPr/>
-        </p:nvSpPr>
-        <p:spPr>
-          <a:xfrm>
-            <a:off x="0" y="0"/>
-            <a:ext cx="9144000" cy="342900"/>
-          </a:xfrm>
-          <a:prstGeom prst="rect">
-            <a:avLst/>
-          </a:prstGeom>
-          <a:solidFill>
-            <a:srgbClr val="FFFFFF"/>
-          </a:solidFill>
-          <a:ln w="0">
-            <a:noFill/>
-          </a:ln>
-        </p:spPr>
-      </p:sp>
-      <p:sp>
-        <p:nvSpPr>
           <p:cNvPr id="297" name="DSPIRA 2"/>
           <p:cNvSpPr>
             <a:spLocks noGrp="1"/>
@@ -41666,57 +43292,6 @@
             <a:noFill/>
           </a:ln>
         </p:spPr>
-      </p:sp>
-      <p:sp>
-        <p:nvSpPr>
-          <p:cNvPr id="298" name="DSPIRA 3"/>
-          <p:cNvSpPr>
-            <a:spLocks noGrp="1"/>
-          </p:cNvSpPr>
-          <p:nvPr/>
-        </p:nvSpPr>
-        <p:spPr>
-          <a:xfrm>
-            <a:off x="228600" y="76200"/>
-            <a:ext cx="4762500" cy="228600"/>
-          </a:xfrm>
-          <a:prstGeom prst="rect">
-            <a:avLst/>
-          </a:prstGeom>
-          <a:noFill/>
-          <a:ln w="0">
-            <a:noFill/>
-          </a:ln>
-        </p:spPr>
-        <p:txBody>
-          <a:bodyPr>
-            <a:noAutofit/>
-          </a:bodyPr>
-          <a:lstStyle/>
-          <a:p>
-            <a:pPr>
-              <a:defRPr sz="1200" b="1">
-                <a:solidFill>
-                  <a:srgbClr val="002855"/>
-                </a:solidFill>
-                <a:latin typeface="Arial"/>
-                <a:ea typeface="Arial"/>
-                <a:cs typeface="Arial"/>
-              </a:defRPr>
-            </a:pPr>
-            <a:r>
-              <a:rPr sz="1200" b="1">
-                <a:solidFill>
-                  <a:srgbClr val="002855"/>
-                </a:solidFill>
-                <a:latin typeface="Arial"/>
-                <a:ea typeface="Arial"/>
-                <a:cs typeface="Arial"/>
-              </a:rPr>
-              <a:t>WVU DSPIRA</a:t>
-            </a:r>
-          </a:p>
-        </p:txBody>
       </p:sp>
       <p:sp>
         <p:nvSpPr>
@@ -41816,6 +43391,156 @@
                 <a:cs typeface="Arial"/>
               </a:rPr>
               <a:t>8 of 20</a:t>
+            </a:r>
+          </a:p>
+        </p:txBody>
+      </p:sp>
+      <p:sp>
+        <p:nvSpPr>
+          <p:cNvPr id="301" name="WVU DSPIRA navy band"/>
+          <p:cNvSpPr>
+            <a:spLocks noGrp="1"/>
+          </p:cNvSpPr>
+          <p:nvPr/>
+        </p:nvSpPr>
+        <p:spPr>
+          <a:xfrm>
+            <a:off x="0" y="0"/>
+            <a:ext cx="9144000" cy="323850"/>
+          </a:xfrm>
+          <a:prstGeom prst="rect">
+            <a:avLst/>
+          </a:prstGeom>
+          <a:solidFill>
+            <a:srgbClr val="002855"/>
+          </a:solidFill>
+          <a:ln w="0">
+            <a:noFill/>
+          </a:ln>
+        </p:spPr>
+      </p:sp>
+      <p:sp>
+        <p:nvSpPr>
+          <p:cNvPr id="302" name="WVU DSPIRA gold rule"/>
+          <p:cNvSpPr>
+            <a:spLocks noGrp="1"/>
+          </p:cNvSpPr>
+          <p:nvPr/>
+        </p:nvSpPr>
+        <p:spPr>
+          <a:xfrm>
+            <a:off x="0" y="323850"/>
+            <a:ext cx="9144000" cy="19050"/>
+          </a:xfrm>
+          <a:prstGeom prst="rect">
+            <a:avLst/>
+          </a:prstGeom>
+          <a:solidFill>
+            <a:srgbClr val="EEAA00"/>
+          </a:solidFill>
+          <a:ln w="0">
+            <a:noFill/>
+          </a:ln>
+        </p:spPr>
+      </p:sp>
+      <p:sp>
+        <p:nvSpPr>
+          <p:cNvPr id="303" name="WVU DSPIRA name"/>
+          <p:cNvSpPr>
+            <a:spLocks noGrp="1"/>
+          </p:cNvSpPr>
+          <p:nvPr/>
+        </p:nvSpPr>
+        <p:spPr>
+          <a:xfrm>
+            <a:off x="228600" y="19050"/>
+            <a:ext cx="2857500" cy="257175"/>
+          </a:xfrm>
+          <a:prstGeom prst="rect">
+            <a:avLst/>
+          </a:prstGeom>
+          <a:noFill/>
+          <a:ln w="0">
+            <a:noFill/>
+          </a:ln>
+        </p:spPr>
+        <p:txBody>
+          <a:bodyPr>
+            <a:noAutofit/>
+          </a:bodyPr>
+          <a:lstStyle/>
+          <a:p>
+            <a:pPr>
+              <a:defRPr sz="1600" b="1">
+                <a:solidFill>
+                  <a:srgbClr val="FFFFFF"/>
+                </a:solidFill>
+                <a:latin typeface="Arial"/>
+                <a:ea typeface="Arial"/>
+                <a:cs typeface="Arial"/>
+              </a:defRPr>
+            </a:pPr>
+            <a:r>
+              <a:rPr sz="1600" b="1">
+                <a:solidFill>
+                  <a:srgbClr val="FFFFFF"/>
+                </a:solidFill>
+                <a:latin typeface="Arial"/>
+                <a:ea typeface="Arial"/>
+                <a:cs typeface="Arial"/>
+              </a:rPr>
+              <a:t>WVU DSPIRA</a:t>
+            </a:r>
+          </a:p>
+        </p:txBody>
+      </p:sp>
+      <p:sp>
+        <p:nvSpPr>
+          <p:cNvPr id="304" name="WVU DSPIRA university"/>
+          <p:cNvSpPr>
+            <a:spLocks noGrp="1"/>
+          </p:cNvSpPr>
+          <p:nvPr/>
+        </p:nvSpPr>
+        <p:spPr>
+          <a:xfrm>
+            <a:off x="6286500" y="114300"/>
+            <a:ext cx="2628900" cy="171450"/>
+          </a:xfrm>
+          <a:prstGeom prst="rect">
+            <a:avLst/>
+          </a:prstGeom>
+          <a:noFill/>
+          <a:ln w="0">
+            <a:noFill/>
+          </a:ln>
+        </p:spPr>
+        <p:txBody>
+          <a:bodyPr>
+            <a:noAutofit/>
+          </a:bodyPr>
+          <a:lstStyle/>
+          <a:p>
+            <a:pPr algn="r">
+              <a:defRPr sz="900">
+                <a:solidFill>
+                  <a:srgbClr val="FFFFFF"/>
+                </a:solidFill>
+                <a:latin typeface="Arial"/>
+                <a:ea typeface="Arial"/>
+                <a:cs typeface="Arial"/>
+              </a:defRPr>
+            </a:pPr>
+            <a:r>
+              <a:rPr sz="900">
+                <a:solidFill>
+                  <a:srgbClr val="FFFFFF"/>
+                </a:solidFill>
+                <a:latin typeface="Arial"/>
+                <a:ea typeface="Arial"/>
+                <a:cs typeface="Arial"/>
+              </a:rPr>
+              <a:t>WEST VIRGINIA UNIVERSITY</a:t>
             </a:r>
           </a:p>
         </p:txBody>

--- a/assets/lessons/lectures/astronomy/planning-observations-2018.pptx
+++ b/assets/lessons/lectures/astronomy/planning-observations-2018.pptx
@@ -6890,7 +6890,7 @@
                 <a:ea typeface="Arial"/>
                 <a:cs typeface="Arial"/>
               </a:rPr>
-              <a:t>wvurail.org/dspira</a:t>
+              <a:t>rail.wvu.edu/dspira</a:t>
             </a:r>
           </a:p>
         </p:txBody>
